--- a/praesentation/Vier_Gewinnt_Praesentation_FINAL.pptx
+++ b/praesentation/Vier_Gewinnt_Praesentation_FINAL.pptx
@@ -2325,6 +2325,10 @@
             <a:prstDash val="solid"/>
           </a:ln>
         </p:spPr>
+        <p:txBody>
+          <a:bodyPr/>
+          <a:p/>
+        </p:txBody>
       </p:sp>
       <p:sp>
         <p:nvSpPr>
@@ -2352,6 +2356,10 @@
             <a:prstDash val="solid"/>
           </a:ln>
         </p:spPr>
+        <p:txBody>
+          <a:bodyPr/>
+          <a:p/>
+        </p:txBody>
       </p:sp>
       <p:pic>
         <p:nvPicPr>
@@ -2403,6 +2411,10 @@
             <a:prstDash val="solid"/>
           </a:ln>
         </p:spPr>
+        <p:txBody>
+          <a:bodyPr/>
+          <a:p/>
+        </p:txBody>
       </p:sp>
       <p:sp>
         <p:nvSpPr>
@@ -2430,6 +2442,10 @@
             <a:prstDash val="solid"/>
           </a:ln>
         </p:spPr>
+        <p:txBody>
+          <a:bodyPr/>
+          <a:p/>
+        </p:txBody>
       </p:sp>
       <p:pic>
         <p:nvPicPr>
@@ -2657,6 +2673,10 @@
             <a:prstDash val="solid"/>
           </a:ln>
         </p:spPr>
+        <p:txBody>
+          <a:bodyPr/>
+          <a:p/>
+        </p:txBody>
       </p:sp>
       <p:sp>
         <p:nvSpPr>
@@ -2774,6 +2794,10 @@
             <a:prstDash val="solid"/>
           </a:ln>
         </p:spPr>
+        <p:txBody>
+          <a:bodyPr/>
+          <a:p/>
+        </p:txBody>
       </p:sp>
       <p:sp>
         <p:nvSpPr>
@@ -2841,6 +2865,10 @@
             <a:prstDash val="solid"/>
           </a:ln>
         </p:spPr>
+        <p:txBody>
+          <a:bodyPr/>
+          <a:p/>
+        </p:txBody>
       </p:sp>
       <p:sp>
         <p:nvSpPr>
@@ -2924,7 +2952,7 @@
                 <a:ea typeface="Inter" pitchFamily="34" charset="-122"/>
                 <a:cs typeface="Inter" pitchFamily="34" charset="-120"/>
               </a:rPr>
-              <a:t>© 2026 Julian Krauß  ·  JK-CD-DE-2026-003</a:t>
+              <a:t>© 2026 Julian Krauß  ·  JK AXIS | GOLD MASTER</a:t>
             </a:r>
             <a:endParaRPr lang="en-US" sz="820" dirty="0"/>
           </a:p>
@@ -3005,6 +3033,10 @@
             <a:prstDash val="solid"/>
           </a:ln>
         </p:spPr>
+        <p:txBody>
+          <a:bodyPr/>
+          <a:p/>
+        </p:txBody>
       </p:sp>
       <p:sp>
         <p:nvSpPr>
@@ -3032,6 +3064,10 @@
             <a:prstDash val="solid"/>
           </a:ln>
         </p:spPr>
+        <p:txBody>
+          <a:bodyPr/>
+          <a:p/>
+        </p:txBody>
       </p:sp>
       <p:sp>
         <p:nvSpPr>
@@ -3059,6 +3095,10 @@
             <a:prstDash val="solid"/>
           </a:ln>
         </p:spPr>
+        <p:txBody>
+          <a:bodyPr/>
+          <a:p/>
+        </p:txBody>
       </p:sp>
       <p:pic>
         <p:nvPicPr>
@@ -3403,6 +3443,10 @@
             <a:prstDash val="solid"/>
           </a:ln>
         </p:spPr>
+        <p:txBody>
+          <a:bodyPr/>
+          <a:p/>
+        </p:txBody>
       </p:sp>
       <p:sp>
         <p:nvSpPr>
@@ -3442,7 +3486,7 @@
                 <a:ea typeface="Inter" pitchFamily="34" charset="-122"/>
                 <a:cs typeface="Inter" pitchFamily="34" charset="-120"/>
               </a:rPr>
-              <a:t>© 2026 Julian Krauß  ·  JK-CD-DE-2026-003  ·  Bernd-Blindow-Schulen Ravensburg</a:t>
+              <a:t>© 2026 Julian Krauß  ·  JK AXIS | GOLD MASTER  ·  Bernd-Blindow-Schulen Ravensburg</a:t>
             </a:r>
             <a:endParaRPr lang="en-US" sz="760" dirty="0"/>
           </a:p>
@@ -3520,6 +3564,10 @@
             <a:prstDash val="solid"/>
           </a:ln>
         </p:spPr>
+        <p:txBody>
+          <a:bodyPr/>
+          <a:p/>
+        </p:txBody>
       </p:sp>
       <p:sp>
         <p:nvSpPr>
@@ -3593,6 +3641,10 @@
             <a:prstDash val="solid"/>
           </a:ln>
         </p:spPr>
+        <p:txBody>
+          <a:bodyPr/>
+          <a:p/>
+        </p:txBody>
       </p:sp>
       <p:sp>
         <p:nvSpPr>
@@ -3666,6 +3718,10 @@
             <a:prstDash val="solid"/>
           </a:ln>
         </p:spPr>
+        <p:txBody>
+          <a:bodyPr/>
+          <a:p/>
+        </p:txBody>
       </p:sp>
       <p:sp>
         <p:nvSpPr>
@@ -3739,6 +3795,10 @@
             <a:prstDash val="solid"/>
           </a:ln>
         </p:spPr>
+        <p:txBody>
+          <a:bodyPr/>
+          <a:p/>
+        </p:txBody>
       </p:sp>
       <p:sp>
         <p:nvSpPr>
@@ -3812,6 +3872,10 @@
             <a:prstDash val="solid"/>
           </a:ln>
         </p:spPr>
+        <p:txBody>
+          <a:bodyPr/>
+          <a:p/>
+        </p:txBody>
       </p:sp>
       <p:sp>
         <p:nvSpPr>
@@ -3883,6 +3947,10 @@
             <a:prstDash val="solid"/>
           </a:ln>
         </p:spPr>
+        <p:txBody>
+          <a:bodyPr/>
+          <a:p/>
+        </p:txBody>
       </p:sp>
       <p:sp>
         <p:nvSpPr>
@@ -3912,6 +3980,10 @@
             <a:prstDash val="solid"/>
           </a:ln>
         </p:spPr>
+        <p:txBody>
+          <a:bodyPr/>
+          <a:p/>
+        </p:txBody>
       </p:sp>
       <p:sp>
         <p:nvSpPr>
@@ -4071,6 +4143,10 @@
             <a:prstDash val="solid"/>
           </a:ln>
         </p:spPr>
+        <p:txBody>
+          <a:bodyPr/>
+          <a:p/>
+        </p:txBody>
       </p:sp>
       <p:sp>
         <p:nvSpPr>
@@ -4100,6 +4176,10 @@
             <a:prstDash val="solid"/>
           </a:ln>
         </p:spPr>
+        <p:txBody>
+          <a:bodyPr/>
+          <a:p/>
+        </p:txBody>
       </p:sp>
       <p:sp>
         <p:nvSpPr>
@@ -4259,6 +4339,10 @@
             <a:prstDash val="solid"/>
           </a:ln>
         </p:spPr>
+        <p:txBody>
+          <a:bodyPr/>
+          <a:p/>
+        </p:txBody>
       </p:sp>
       <p:sp>
         <p:nvSpPr>
@@ -4288,6 +4372,10 @@
             <a:prstDash val="solid"/>
           </a:ln>
         </p:spPr>
+        <p:txBody>
+          <a:bodyPr/>
+          <a:p/>
+        </p:txBody>
       </p:sp>
       <p:sp>
         <p:nvSpPr>
@@ -4447,6 +4535,10 @@
             <a:prstDash val="solid"/>
           </a:ln>
         </p:spPr>
+        <p:txBody>
+          <a:bodyPr/>
+          <a:p/>
+        </p:txBody>
       </p:sp>
       <p:sp>
         <p:nvSpPr>
@@ -4476,6 +4568,10 @@
             <a:prstDash val="solid"/>
           </a:ln>
         </p:spPr>
+        <p:txBody>
+          <a:bodyPr/>
+          <a:p/>
+        </p:txBody>
       </p:sp>
       <p:sp>
         <p:nvSpPr>
@@ -4635,6 +4731,10 @@
             <a:prstDash val="solid"/>
           </a:ln>
         </p:spPr>
+        <p:txBody>
+          <a:bodyPr/>
+          <a:p/>
+        </p:txBody>
       </p:sp>
       <p:sp>
         <p:nvSpPr>
@@ -4664,6 +4764,10 @@
             <a:prstDash val="solid"/>
           </a:ln>
         </p:spPr>
+        <p:txBody>
+          <a:bodyPr/>
+          <a:p/>
+        </p:txBody>
       </p:sp>
       <p:sp>
         <p:nvSpPr>
@@ -4823,6 +4927,10 @@
             <a:prstDash val="solid"/>
           </a:ln>
         </p:spPr>
+        <p:txBody>
+          <a:bodyPr/>
+          <a:p/>
+        </p:txBody>
       </p:sp>
       <p:sp>
         <p:nvSpPr>
@@ -4852,6 +4960,10 @@
             <a:prstDash val="solid"/>
           </a:ln>
         </p:spPr>
+        <p:txBody>
+          <a:bodyPr/>
+          <a:p/>
+        </p:txBody>
       </p:sp>
       <p:sp>
         <p:nvSpPr>
@@ -5013,6 +5125,10 @@
             <a:prstDash val="solid"/>
           </a:ln>
         </p:spPr>
+        <p:txBody>
+          <a:bodyPr/>
+          <a:p/>
+        </p:txBody>
       </p:sp>
       <p:sp>
         <p:nvSpPr>
@@ -5109,6 +5225,10 @@
             <a:prstDash val="solid"/>
           </a:ln>
         </p:spPr>
+        <p:txBody>
+          <a:bodyPr/>
+          <a:p/>
+        </p:txBody>
       </p:sp>
       <p:sp>
         <p:nvSpPr>
@@ -5136,6 +5256,10 @@
             <a:prstDash val="solid"/>
           </a:ln>
         </p:spPr>
+        <p:txBody>
+          <a:bodyPr/>
+          <a:p/>
+        </p:txBody>
       </p:sp>
       <p:sp>
         <p:nvSpPr>
@@ -5163,6 +5287,10 @@
             <a:prstDash val="solid"/>
           </a:ln>
         </p:spPr>
+        <p:txBody>
+          <a:bodyPr/>
+          <a:p/>
+        </p:txBody>
       </p:sp>
       <p:pic>
         <p:nvPicPr>
@@ -5507,6 +5635,10 @@
             <a:prstDash val="solid"/>
           </a:ln>
         </p:spPr>
+        <p:txBody>
+          <a:bodyPr/>
+          <a:p/>
+        </p:txBody>
       </p:sp>
       <p:sp>
         <p:nvSpPr>
@@ -5546,7 +5678,7 @@
                 <a:ea typeface="Inter" pitchFamily="34" charset="-122"/>
                 <a:cs typeface="Inter" pitchFamily="34" charset="-120"/>
               </a:rPr>
-              <a:t>© 2026 Julian Krauß  ·  JK-CD-DE-2026-003  ·  Bernd-Blindow-Schulen Ravensburg</a:t>
+              <a:t>© 2026 Julian Krauß  ·  JK AXIS | GOLD MASTER  ·  Bernd-Blindow-Schulen Ravensburg</a:t>
             </a:r>
             <a:endParaRPr lang="en-US" sz="760" dirty="0"/>
           </a:p>
@@ -5624,6 +5756,10 @@
             <a:prstDash val="solid"/>
           </a:ln>
         </p:spPr>
+        <p:txBody>
+          <a:bodyPr/>
+          <a:p/>
+        </p:txBody>
       </p:sp>
       <p:sp>
         <p:nvSpPr>
@@ -5697,6 +5833,10 @@
             <a:prstDash val="solid"/>
           </a:ln>
         </p:spPr>
+        <p:txBody>
+          <a:bodyPr/>
+          <a:p/>
+        </p:txBody>
       </p:sp>
       <p:sp>
         <p:nvSpPr>
@@ -5770,6 +5910,10 @@
             <a:prstDash val="solid"/>
           </a:ln>
         </p:spPr>
+        <p:txBody>
+          <a:bodyPr/>
+          <a:p/>
+        </p:txBody>
       </p:sp>
       <p:sp>
         <p:nvSpPr>
@@ -5843,6 +5987,10 @@
             <a:prstDash val="solid"/>
           </a:ln>
         </p:spPr>
+        <p:txBody>
+          <a:bodyPr/>
+          <a:p/>
+        </p:txBody>
       </p:sp>
       <p:sp>
         <p:nvSpPr>
@@ -5916,6 +6064,10 @@
             <a:prstDash val="solid"/>
           </a:ln>
         </p:spPr>
+        <p:txBody>
+          <a:bodyPr/>
+          <a:p/>
+        </p:txBody>
       </p:sp>
       <p:sp>
         <p:nvSpPr>
@@ -5987,6 +6139,10 @@
             <a:prstDash val="solid"/>
           </a:ln>
         </p:spPr>
+        <p:txBody>
+          <a:bodyPr/>
+          <a:p/>
+        </p:txBody>
       </p:sp>
       <p:sp>
         <p:nvSpPr>
@@ -6058,6 +6214,10 @@
             <a:prstDash val="solid"/>
           </a:ln>
         </p:spPr>
+        <p:txBody>
+          <a:bodyPr/>
+          <a:p/>
+        </p:txBody>
       </p:sp>
       <p:sp>
         <p:nvSpPr>
@@ -6173,6 +6333,10 @@
             <a:prstDash val="solid"/>
           </a:ln>
         </p:spPr>
+        <p:txBody>
+          <a:bodyPr/>
+          <a:p/>
+        </p:txBody>
       </p:sp>
       <p:sp>
         <p:nvSpPr>
@@ -6288,6 +6452,10 @@
             <a:prstDash val="solid"/>
           </a:ln>
         </p:spPr>
+        <p:txBody>
+          <a:bodyPr/>
+          <a:p/>
+        </p:txBody>
       </p:sp>
       <p:sp>
         <p:nvSpPr>
@@ -6403,6 +6571,10 @@
             <a:prstDash val="solid"/>
           </a:ln>
         </p:spPr>
+        <p:txBody>
+          <a:bodyPr/>
+          <a:p/>
+        </p:txBody>
       </p:sp>
       <p:sp>
         <p:nvSpPr>
@@ -6518,6 +6690,10 @@
             <a:prstDash val="solid"/>
           </a:ln>
         </p:spPr>
+        <p:txBody>
+          <a:bodyPr/>
+          <a:p/>
+        </p:txBody>
       </p:sp>
       <p:sp>
         <p:nvSpPr>
@@ -6633,6 +6809,10 @@
             <a:prstDash val="solid"/>
           </a:ln>
         </p:spPr>
+        <p:txBody>
+          <a:bodyPr/>
+          <a:p/>
+        </p:txBody>
       </p:sp>
       <p:sp>
         <p:nvSpPr>
@@ -6877,6 +7057,10 @@
             <a:prstDash val="solid"/>
           </a:ln>
         </p:spPr>
+        <p:txBody>
+          <a:bodyPr/>
+          <a:p/>
+        </p:txBody>
       </p:sp>
       <p:sp>
         <p:nvSpPr>
@@ -6904,6 +7088,10 @@
             <a:prstDash val="solid"/>
           </a:ln>
         </p:spPr>
+        <p:txBody>
+          <a:bodyPr/>
+          <a:p/>
+        </p:txBody>
       </p:sp>
       <p:sp>
         <p:nvSpPr>
@@ -6931,6 +7119,10 @@
             <a:prstDash val="solid"/>
           </a:ln>
         </p:spPr>
+        <p:txBody>
+          <a:bodyPr/>
+          <a:p/>
+        </p:txBody>
       </p:sp>
       <p:pic>
         <p:nvPicPr>
@@ -7275,6 +7467,10 @@
             <a:prstDash val="solid"/>
           </a:ln>
         </p:spPr>
+        <p:txBody>
+          <a:bodyPr/>
+          <a:p/>
+        </p:txBody>
       </p:sp>
       <p:sp>
         <p:nvSpPr>
@@ -7314,7 +7510,7 @@
                 <a:ea typeface="Inter" pitchFamily="34" charset="-122"/>
                 <a:cs typeface="Inter" pitchFamily="34" charset="-120"/>
               </a:rPr>
-              <a:t>© 2026 Julian Krauß  ·  JK-CD-DE-2026-003  ·  Bernd-Blindow-Schulen Ravensburg</a:t>
+              <a:t>© 2026 Julian Krauß  ·  JK AXIS | GOLD MASTER  ·  Bernd-Blindow-Schulen Ravensburg</a:t>
             </a:r>
             <a:endParaRPr lang="en-US" sz="760" dirty="0"/>
           </a:p>
@@ -7392,6 +7588,10 @@
             <a:prstDash val="solid"/>
           </a:ln>
         </p:spPr>
+        <p:txBody>
+          <a:bodyPr/>
+          <a:p/>
+        </p:txBody>
       </p:sp>
       <p:sp>
         <p:nvSpPr>
@@ -7465,6 +7665,10 @@
             <a:prstDash val="solid"/>
           </a:ln>
         </p:spPr>
+        <p:txBody>
+          <a:bodyPr/>
+          <a:p/>
+        </p:txBody>
       </p:sp>
       <p:sp>
         <p:nvSpPr>
@@ -7538,6 +7742,10 @@
             <a:prstDash val="solid"/>
           </a:ln>
         </p:spPr>
+        <p:txBody>
+          <a:bodyPr/>
+          <a:p/>
+        </p:txBody>
       </p:sp>
       <p:sp>
         <p:nvSpPr>
@@ -7611,6 +7819,10 @@
             <a:prstDash val="solid"/>
           </a:ln>
         </p:spPr>
+        <p:txBody>
+          <a:bodyPr/>
+          <a:p/>
+        </p:txBody>
       </p:sp>
       <p:sp>
         <p:nvSpPr>
@@ -7684,6 +7896,10 @@
             <a:prstDash val="solid"/>
           </a:ln>
         </p:spPr>
+        <p:txBody>
+          <a:bodyPr/>
+          <a:p/>
+        </p:txBody>
       </p:sp>
       <p:sp>
         <p:nvSpPr>
@@ -7755,6 +7971,10 @@
             <a:prstDash val="solid"/>
           </a:ln>
         </p:spPr>
+        <p:txBody>
+          <a:bodyPr/>
+          <a:p/>
+        </p:txBody>
       </p:sp>
       <p:sp>
         <p:nvSpPr>
@@ -7782,6 +8002,10 @@
             <a:prstDash val="solid"/>
           </a:ln>
         </p:spPr>
+        <p:txBody>
+          <a:bodyPr/>
+          <a:p/>
+        </p:txBody>
       </p:sp>
       <p:sp>
         <p:nvSpPr>
@@ -7811,6 +8035,10 @@
             <a:prstDash val="solid"/>
           </a:ln>
         </p:spPr>
+        <p:txBody>
+          <a:bodyPr/>
+          <a:p/>
+        </p:txBody>
       </p:sp>
       <p:sp>
         <p:nvSpPr>
@@ -8008,6 +8236,10 @@
             <a:prstDash val="solid"/>
           </a:ln>
         </p:spPr>
+        <p:txBody>
+          <a:bodyPr/>
+          <a:p/>
+        </p:txBody>
       </p:sp>
       <p:sp>
         <p:nvSpPr>
@@ -8228,6 +8460,10 @@
             <a:prstDash val="solid"/>
           </a:ln>
         </p:spPr>
+        <p:txBody>
+          <a:bodyPr/>
+          <a:p/>
+        </p:txBody>
       </p:sp>
       <p:sp>
         <p:nvSpPr>
@@ -8255,6 +8491,10 @@
             <a:prstDash val="solid"/>
           </a:ln>
         </p:spPr>
+        <p:txBody>
+          <a:bodyPr/>
+          <a:p/>
+        </p:txBody>
       </p:sp>
       <p:sp>
         <p:nvSpPr>
@@ -8282,6 +8522,10 @@
             <a:prstDash val="solid"/>
           </a:ln>
         </p:spPr>
+        <p:txBody>
+          <a:bodyPr/>
+          <a:p/>
+        </p:txBody>
       </p:sp>
       <p:pic>
         <p:nvPicPr>
@@ -8626,6 +8870,10 @@
             <a:prstDash val="solid"/>
           </a:ln>
         </p:spPr>
+        <p:txBody>
+          <a:bodyPr/>
+          <a:p/>
+        </p:txBody>
       </p:sp>
       <p:sp>
         <p:nvSpPr>
@@ -8665,7 +8913,7 @@
                 <a:ea typeface="Inter" pitchFamily="34" charset="-122"/>
                 <a:cs typeface="Inter" pitchFamily="34" charset="-120"/>
               </a:rPr>
-              <a:t>© 2026 Julian Krauß  ·  JK-CD-DE-2026-003  ·  Bernd-Blindow-Schulen Ravensburg</a:t>
+              <a:t>© 2026 Julian Krauß  ·  JK AXIS | GOLD MASTER  ·  Bernd-Blindow-Schulen Ravensburg</a:t>
             </a:r>
             <a:endParaRPr lang="en-US" sz="760" dirty="0"/>
           </a:p>
@@ -8743,6 +8991,10 @@
             <a:prstDash val="solid"/>
           </a:ln>
         </p:spPr>
+        <p:txBody>
+          <a:bodyPr/>
+          <a:p/>
+        </p:txBody>
       </p:sp>
       <p:sp>
         <p:nvSpPr>
@@ -8816,6 +9068,10 @@
             <a:prstDash val="solid"/>
           </a:ln>
         </p:spPr>
+        <p:txBody>
+          <a:bodyPr/>
+          <a:p/>
+        </p:txBody>
       </p:sp>
       <p:sp>
         <p:nvSpPr>
@@ -8889,6 +9145,10 @@
             <a:prstDash val="solid"/>
           </a:ln>
         </p:spPr>
+        <p:txBody>
+          <a:bodyPr/>
+          <a:p/>
+        </p:txBody>
       </p:sp>
       <p:sp>
         <p:nvSpPr>
@@ -8962,6 +9222,10 @@
             <a:prstDash val="solid"/>
           </a:ln>
         </p:spPr>
+        <p:txBody>
+          <a:bodyPr/>
+          <a:p/>
+        </p:txBody>
       </p:sp>
       <p:sp>
         <p:nvSpPr>
@@ -9035,6 +9299,10 @@
             <a:prstDash val="solid"/>
           </a:ln>
         </p:spPr>
+        <p:txBody>
+          <a:bodyPr/>
+          <a:p/>
+        </p:txBody>
       </p:sp>
       <p:sp>
         <p:nvSpPr>
@@ -9106,6 +9374,10 @@
             <a:prstDash val="solid"/>
           </a:ln>
         </p:spPr>
+        <p:txBody>
+          <a:bodyPr/>
+          <a:p/>
+        </p:txBody>
       </p:sp>
       <p:sp>
         <p:nvSpPr>
@@ -9133,6 +9405,10 @@
             <a:prstDash val="solid"/>
           </a:ln>
         </p:spPr>
+        <p:txBody>
+          <a:bodyPr/>
+          <a:p/>
+        </p:txBody>
       </p:sp>
       <p:sp>
         <p:nvSpPr>
@@ -9248,6 +9524,10 @@
             <a:prstDash val="solid"/>
           </a:ln>
         </p:spPr>
+        <p:txBody>
+          <a:bodyPr/>
+          <a:p/>
+        </p:txBody>
       </p:sp>
       <p:sp>
         <p:nvSpPr>
@@ -9275,6 +9555,10 @@
             <a:prstDash val="solid"/>
           </a:ln>
         </p:spPr>
+        <p:txBody>
+          <a:bodyPr/>
+          <a:p/>
+        </p:txBody>
       </p:sp>
       <p:sp>
         <p:nvSpPr>
@@ -9390,6 +9674,10 @@
             <a:prstDash val="solid"/>
           </a:ln>
         </p:spPr>
+        <p:txBody>
+          <a:bodyPr/>
+          <a:p/>
+        </p:txBody>
       </p:sp>
       <p:sp>
         <p:nvSpPr>
@@ -9417,6 +9705,10 @@
             <a:prstDash val="solid"/>
           </a:ln>
         </p:spPr>
+        <p:txBody>
+          <a:bodyPr/>
+          <a:p/>
+        </p:txBody>
       </p:sp>
       <p:sp>
         <p:nvSpPr>
@@ -9534,6 +9826,10 @@
             <a:prstDash val="solid"/>
           </a:ln>
         </p:spPr>
+        <p:txBody>
+          <a:bodyPr/>
+          <a:p/>
+        </p:txBody>
       </p:sp>
       <p:sp>
         <p:nvSpPr>
@@ -9630,6 +9926,10 @@
             <a:prstDash val="solid"/>
           </a:ln>
         </p:spPr>
+        <p:txBody>
+          <a:bodyPr/>
+          <a:p/>
+        </p:txBody>
       </p:sp>
       <p:sp>
         <p:nvSpPr>
@@ -9657,6 +9957,10 @@
             <a:prstDash val="solid"/>
           </a:ln>
         </p:spPr>
+        <p:txBody>
+          <a:bodyPr/>
+          <a:p/>
+        </p:txBody>
       </p:sp>
       <p:sp>
         <p:nvSpPr>
@@ -9684,6 +9988,10 @@
             <a:prstDash val="solid"/>
           </a:ln>
         </p:spPr>
+        <p:txBody>
+          <a:bodyPr/>
+          <a:p/>
+        </p:txBody>
       </p:sp>
       <p:pic>
         <p:nvPicPr>
@@ -10028,6 +10336,10 @@
             <a:prstDash val="solid"/>
           </a:ln>
         </p:spPr>
+        <p:txBody>
+          <a:bodyPr/>
+          <a:p/>
+        </p:txBody>
       </p:sp>
       <p:sp>
         <p:nvSpPr>
@@ -10067,7 +10379,7 @@
                 <a:ea typeface="Inter" pitchFamily="34" charset="-122"/>
                 <a:cs typeface="Inter" pitchFamily="34" charset="-120"/>
               </a:rPr>
-              <a:t>© 2026 Julian Krauß  ·  JK-CD-DE-2026-003  ·  Bernd-Blindow-Schulen Ravensburg</a:t>
+              <a:t>© 2026 Julian Krauß  ·  JK AXIS | GOLD MASTER  ·  Bernd-Blindow-Schulen Ravensburg</a:t>
             </a:r>
             <a:endParaRPr lang="en-US" sz="760" dirty="0"/>
           </a:p>
@@ -10143,6 +10455,10 @@
             <a:prstDash val="solid"/>
           </a:ln>
         </p:spPr>
+        <p:txBody>
+          <a:bodyPr/>
+          <a:p/>
+        </p:txBody>
       </p:sp>
       <p:sp>
         <p:nvSpPr>
@@ -10214,6 +10530,10 @@
             <a:prstDash val="solid"/>
           </a:ln>
         </p:spPr>
+        <p:txBody>
+          <a:bodyPr/>
+          <a:p/>
+        </p:txBody>
       </p:sp>
       <p:sp>
         <p:nvSpPr>
@@ -10285,6 +10605,10 @@
             <a:prstDash val="solid"/>
           </a:ln>
         </p:spPr>
+        <p:txBody>
+          <a:bodyPr/>
+          <a:p/>
+        </p:txBody>
       </p:sp>
       <p:sp>
         <p:nvSpPr>
@@ -10356,6 +10680,10 @@
             <a:prstDash val="solid"/>
           </a:ln>
         </p:spPr>
+        <p:txBody>
+          <a:bodyPr/>
+          <a:p/>
+        </p:txBody>
       </p:sp>
       <p:sp>
         <p:nvSpPr>
@@ -10427,6 +10755,10 @@
             <a:prstDash val="solid"/>
           </a:ln>
         </p:spPr>
+        <p:txBody>
+          <a:bodyPr/>
+          <a:p/>
+        </p:txBody>
       </p:sp>
       <p:sp>
         <p:nvSpPr>
@@ -10498,6 +10830,10 @@
             <a:prstDash val="solid"/>
           </a:ln>
         </p:spPr>
+        <p:txBody>
+          <a:bodyPr/>
+          <a:p/>
+        </p:txBody>
       </p:sp>
       <p:sp>
         <p:nvSpPr>
@@ -10569,6 +10905,10 @@
             <a:prstDash val="solid"/>
           </a:ln>
         </p:spPr>
+        <p:txBody>
+          <a:bodyPr/>
+          <a:p/>
+        </p:txBody>
       </p:sp>
       <p:sp>
         <p:nvSpPr>
@@ -10640,6 +10980,10 @@
             <a:prstDash val="solid"/>
           </a:ln>
         </p:spPr>
+        <p:txBody>
+          <a:bodyPr/>
+          <a:p/>
+        </p:txBody>
       </p:sp>
       <p:sp>
         <p:nvSpPr>
@@ -10711,6 +11055,10 @@
             <a:prstDash val="solid"/>
           </a:ln>
         </p:spPr>
+        <p:txBody>
+          <a:bodyPr/>
+          <a:p/>
+        </p:txBody>
       </p:sp>
       <p:sp>
         <p:nvSpPr>
@@ -10782,6 +11130,10 @@
             <a:prstDash val="solid"/>
           </a:ln>
         </p:spPr>
+        <p:txBody>
+          <a:bodyPr/>
+          <a:p/>
+        </p:txBody>
       </p:sp>
       <p:sp>
         <p:nvSpPr>
@@ -10922,6 +11274,10 @@
             <a:prstDash val="solid"/>
           </a:ln>
         </p:spPr>
+        <p:txBody>
+          <a:bodyPr/>
+          <a:p/>
+        </p:txBody>
       </p:sp>
       <p:sp>
         <p:nvSpPr>
@@ -10949,6 +11305,10 @@
             <a:prstDash val="solid"/>
           </a:ln>
         </p:spPr>
+        <p:txBody>
+          <a:bodyPr/>
+          <a:p/>
+        </p:txBody>
       </p:sp>
       <p:sp>
         <p:nvSpPr>
@@ -10976,6 +11336,10 @@
             <a:prstDash val="solid"/>
           </a:ln>
         </p:spPr>
+        <p:txBody>
+          <a:bodyPr/>
+          <a:p/>
+        </p:txBody>
       </p:sp>
       <p:pic>
         <p:nvPicPr>
@@ -11320,6 +11684,10 @@
             <a:prstDash val="solid"/>
           </a:ln>
         </p:spPr>
+        <p:txBody>
+          <a:bodyPr/>
+          <a:p/>
+        </p:txBody>
       </p:sp>
       <p:sp>
         <p:nvSpPr>
@@ -11359,7 +11727,7 @@
                 <a:ea typeface="Inter" pitchFamily="34" charset="-122"/>
                 <a:cs typeface="Inter" pitchFamily="34" charset="-120"/>
               </a:rPr>
-              <a:t>© 2026 Julian Krauß  ·  JK-CD-DE-2026-003  ·  Bernd-Blindow-Schulen Ravensburg</a:t>
+              <a:t>© 2026 Julian Krauß  ·  JK AXIS | GOLD MASTER  ·  Bernd-Blindow-Schulen Ravensburg</a:t>
             </a:r>
             <a:endParaRPr lang="en-US" sz="760" dirty="0"/>
           </a:p>
@@ -11437,6 +11805,10 @@
             <a:prstDash val="solid"/>
           </a:ln>
         </p:spPr>
+        <p:txBody>
+          <a:bodyPr/>
+          <a:p/>
+        </p:txBody>
       </p:sp>
       <p:sp>
         <p:nvSpPr>
@@ -11554,6 +11926,10 @@
             <a:prstDash val="solid"/>
           </a:ln>
         </p:spPr>
+        <p:txBody>
+          <a:bodyPr/>
+          <a:p/>
+        </p:txBody>
       </p:sp>
       <p:sp>
         <p:nvSpPr>
@@ -11671,6 +12047,10 @@
             <a:prstDash val="solid"/>
           </a:ln>
         </p:spPr>
+        <p:txBody>
+          <a:bodyPr/>
+          <a:p/>
+        </p:txBody>
       </p:sp>
       <p:sp>
         <p:nvSpPr>
@@ -11788,6 +12168,10 @@
             <a:prstDash val="solid"/>
           </a:ln>
         </p:spPr>
+        <p:txBody>
+          <a:bodyPr/>
+          <a:p/>
+        </p:txBody>
       </p:sp>
       <p:sp>
         <p:nvSpPr>
@@ -11905,6 +12289,10 @@
             <a:prstDash val="solid"/>
           </a:ln>
         </p:spPr>
+        <p:txBody>
+          <a:bodyPr/>
+          <a:p/>
+        </p:txBody>
       </p:sp>
       <p:sp>
         <p:nvSpPr>
@@ -12022,6 +12410,10 @@
             <a:prstDash val="solid"/>
           </a:ln>
         </p:spPr>
+        <p:txBody>
+          <a:bodyPr/>
+          <a:p/>
+        </p:txBody>
       </p:sp>
       <p:sp>
         <p:nvSpPr>
@@ -12162,6 +12554,10 @@
             <a:prstDash val="solid"/>
           </a:ln>
         </p:spPr>
+        <p:txBody>
+          <a:bodyPr/>
+          <a:p/>
+        </p:txBody>
       </p:sp>
       <p:sp>
         <p:nvSpPr>
@@ -12189,6 +12585,10 @@
             <a:prstDash val="solid"/>
           </a:ln>
         </p:spPr>
+        <p:txBody>
+          <a:bodyPr/>
+          <a:p/>
+        </p:txBody>
       </p:sp>
       <p:sp>
         <p:nvSpPr>
@@ -12216,6 +12616,10 @@
             <a:prstDash val="solid"/>
           </a:ln>
         </p:spPr>
+        <p:txBody>
+          <a:bodyPr/>
+          <a:p/>
+        </p:txBody>
       </p:sp>
       <p:pic>
         <p:nvPicPr>
@@ -12560,6 +12964,10 @@
             <a:prstDash val="solid"/>
           </a:ln>
         </p:spPr>
+        <p:txBody>
+          <a:bodyPr/>
+          <a:p/>
+        </p:txBody>
       </p:sp>
       <p:sp>
         <p:nvSpPr>
@@ -12599,7 +13007,7 @@
                 <a:ea typeface="Inter" pitchFamily="34" charset="-122"/>
                 <a:cs typeface="Inter" pitchFamily="34" charset="-120"/>
               </a:rPr>
-              <a:t>© 2026 Julian Krauß  ·  JK-CD-DE-2026-003  ·  Bernd-Blindow-Schulen Ravensburg</a:t>
+              <a:t>© 2026 Julian Krauß  ·  JK AXIS | GOLD MASTER  ·  Bernd-Blindow-Schulen Ravensburg</a:t>
             </a:r>
             <a:endParaRPr lang="en-US" sz="760" dirty="0"/>
           </a:p>
@@ -12675,6 +13083,10 @@
             <a:prstDash val="solid"/>
           </a:ln>
         </p:spPr>
+        <p:txBody>
+          <a:bodyPr/>
+          <a:p/>
+        </p:txBody>
       </p:sp>
       <p:sp>
         <p:nvSpPr>
@@ -12702,6 +13114,10 @@
             <a:prstDash val="solid"/>
           </a:ln>
         </p:spPr>
+        <p:txBody>
+          <a:bodyPr/>
+          <a:p/>
+        </p:txBody>
       </p:sp>
       <p:sp>
         <p:nvSpPr>
@@ -12817,6 +13233,10 @@
             <a:prstDash val="solid"/>
           </a:ln>
         </p:spPr>
+        <p:txBody>
+          <a:bodyPr/>
+          <a:p/>
+        </p:txBody>
       </p:sp>
       <p:sp>
         <p:nvSpPr>
@@ -12844,6 +13264,10 @@
             <a:prstDash val="solid"/>
           </a:ln>
         </p:spPr>
+        <p:txBody>
+          <a:bodyPr/>
+          <a:p/>
+        </p:txBody>
       </p:sp>
       <p:sp>
         <p:nvSpPr>
@@ -12959,6 +13383,10 @@
             <a:prstDash val="solid"/>
           </a:ln>
         </p:spPr>
+        <p:txBody>
+          <a:bodyPr/>
+          <a:p/>
+        </p:txBody>
       </p:sp>
       <p:sp>
         <p:nvSpPr>
@@ -12986,6 +13414,10 @@
             <a:prstDash val="solid"/>
           </a:ln>
         </p:spPr>
+        <p:txBody>
+          <a:bodyPr/>
+          <a:p/>
+        </p:txBody>
       </p:sp>
       <p:sp>
         <p:nvSpPr>
@@ -13126,6 +13558,10 @@
             <a:prstDash val="solid"/>
           </a:ln>
         </p:spPr>
+        <p:txBody>
+          <a:bodyPr/>
+          <a:p/>
+        </p:txBody>
       </p:sp>
       <p:sp>
         <p:nvSpPr>
@@ -13153,6 +13589,10 @@
             <a:prstDash val="solid"/>
           </a:ln>
         </p:spPr>
+        <p:txBody>
+          <a:bodyPr/>
+          <a:p/>
+        </p:txBody>
       </p:sp>
       <p:sp>
         <p:nvSpPr>
@@ -13180,6 +13620,10 @@
             <a:prstDash val="solid"/>
           </a:ln>
         </p:spPr>
+        <p:txBody>
+          <a:bodyPr/>
+          <a:p/>
+        </p:txBody>
       </p:sp>
       <p:pic>
         <p:nvPicPr>
@@ -13524,6 +13968,10 @@
             <a:prstDash val="solid"/>
           </a:ln>
         </p:spPr>
+        <p:txBody>
+          <a:bodyPr/>
+          <a:p/>
+        </p:txBody>
       </p:sp>
       <p:sp>
         <p:nvSpPr>
@@ -13563,7 +14011,7 @@
                 <a:ea typeface="Inter" pitchFamily="34" charset="-122"/>
                 <a:cs typeface="Inter" pitchFamily="34" charset="-120"/>
               </a:rPr>
-              <a:t>© 2026 Julian Krauß  ·  JK-CD-DE-2026-003  ·  Bernd-Blindow-Schulen Ravensburg</a:t>
+              <a:t>© 2026 Julian Krauß  ·  JK AXIS | GOLD MASTER  ·  Bernd-Blindow-Schulen Ravensburg</a:t>
             </a:r>
             <a:endParaRPr lang="en-US" sz="760" dirty="0"/>
           </a:p>
@@ -13639,6 +14087,10 @@
             <a:prstDash val="solid"/>
           </a:ln>
         </p:spPr>
+        <p:txBody>
+          <a:bodyPr/>
+          <a:p/>
+        </p:txBody>
       </p:sp>
       <p:sp>
         <p:nvSpPr>
@@ -13754,6 +14206,10 @@
             <a:prstDash val="solid"/>
           </a:ln>
         </p:spPr>
+        <p:txBody>
+          <a:bodyPr/>
+          <a:p/>
+        </p:txBody>
       </p:sp>
       <p:sp>
         <p:nvSpPr>
@@ -13869,6 +14325,10 @@
             <a:prstDash val="solid"/>
           </a:ln>
         </p:spPr>
+        <p:txBody>
+          <a:bodyPr/>
+          <a:p/>
+        </p:txBody>
       </p:sp>
       <p:sp>
         <p:nvSpPr>
@@ -13984,6 +14444,10 @@
             <a:prstDash val="solid"/>
           </a:ln>
         </p:spPr>
+        <p:txBody>
+          <a:bodyPr/>
+          <a:p/>
+        </p:txBody>
       </p:sp>
       <p:sp>
         <p:nvSpPr>
@@ -14168,6 +14632,10 @@
             <a:prstDash val="solid"/>
           </a:ln>
         </p:spPr>
+        <p:txBody>
+          <a:bodyPr/>
+          <a:p/>
+        </p:txBody>
       </p:sp>
       <p:sp>
         <p:nvSpPr>
@@ -14195,6 +14663,10 @@
             <a:prstDash val="solid"/>
           </a:ln>
         </p:spPr>
+        <p:txBody>
+          <a:bodyPr/>
+          <a:p/>
+        </p:txBody>
       </p:sp>
       <p:sp>
         <p:nvSpPr>
@@ -14222,6 +14694,10 @@
             <a:prstDash val="solid"/>
           </a:ln>
         </p:spPr>
+        <p:txBody>
+          <a:bodyPr/>
+          <a:p/>
+        </p:txBody>
       </p:sp>
       <p:pic>
         <p:nvPicPr>
@@ -14513,6 +14989,10 @@
             <a:prstDash val="solid"/>
           </a:ln>
         </p:spPr>
+        <p:txBody>
+          <a:bodyPr/>
+          <a:p/>
+        </p:txBody>
       </p:sp>
       <p:sp>
         <p:nvSpPr>
@@ -14552,7 +15032,7 @@
                 <a:ea typeface="Inter" pitchFamily="34" charset="-122"/>
                 <a:cs typeface="Inter" pitchFamily="34" charset="-120"/>
               </a:rPr>
-              <a:t>© 2026 Julian Krauß  ·  JK-CD-DE-2026-003  ·  Bernd-Blindow-Schulen Ravensburg</a:t>
+              <a:t>© 2026 Julian Krauß  ·  JK AXIS | GOLD MASTER  ·  Bernd-Blindow-Schulen Ravensburg</a:t>
             </a:r>
             <a:endParaRPr lang="en-US" sz="760" dirty="0"/>
           </a:p>
@@ -14628,6 +15108,10 @@
             <a:prstDash val="solid"/>
           </a:ln>
         </p:spPr>
+        <p:txBody>
+          <a:bodyPr/>
+          <a:p/>
+        </p:txBody>
       </p:sp>
       <p:sp>
         <p:nvSpPr>
@@ -14657,6 +15141,10 @@
             <a:prstDash val="solid"/>
           </a:ln>
         </p:spPr>
+        <p:txBody>
+          <a:bodyPr/>
+          <a:p/>
+        </p:txBody>
       </p:sp>
       <p:sp>
         <p:nvSpPr>
@@ -14873,6 +15361,10 @@
             <a:prstDash val="solid"/>
           </a:ln>
         </p:spPr>
+        <p:txBody>
+          <a:bodyPr/>
+          <a:p/>
+        </p:txBody>
       </p:sp>
       <p:sp>
         <p:nvSpPr>
@@ -14900,6 +15392,10 @@
             <a:prstDash val="solid"/>
           </a:ln>
         </p:spPr>
+        <p:txBody>
+          <a:bodyPr/>
+          <a:p/>
+        </p:txBody>
       </p:sp>
       <p:sp>
         <p:nvSpPr>
@@ -14929,6 +15425,10 @@
             <a:prstDash val="solid"/>
           </a:ln>
         </p:spPr>
+        <p:txBody>
+          <a:bodyPr/>
+          <a:p/>
+        </p:txBody>
       </p:sp>
       <p:sp>
         <p:nvSpPr>
@@ -15145,6 +15645,10 @@
             <a:prstDash val="solid"/>
           </a:ln>
         </p:spPr>
+        <p:txBody>
+          <a:bodyPr/>
+          <a:p/>
+        </p:txBody>
       </p:sp>
       <p:sp>
         <p:nvSpPr>
@@ -15172,6 +15676,10 @@
             <a:prstDash val="solid"/>
           </a:ln>
         </p:spPr>
+        <p:txBody>
+          <a:bodyPr/>
+          <a:p/>
+        </p:txBody>
       </p:sp>
       <p:sp>
         <p:nvSpPr>
@@ -15201,6 +15709,10 @@
             <a:prstDash val="solid"/>
           </a:ln>
         </p:spPr>
+        <p:txBody>
+          <a:bodyPr/>
+          <a:p/>
+        </p:txBody>
       </p:sp>
       <p:sp>
         <p:nvSpPr>
@@ -15417,6 +15929,10 @@
             <a:prstDash val="solid"/>
           </a:ln>
         </p:spPr>
+        <p:txBody>
+          <a:bodyPr/>
+          <a:p/>
+        </p:txBody>
       </p:sp>
       <p:sp>
         <p:nvSpPr>
@@ -15444,6 +15960,10 @@
             <a:prstDash val="solid"/>
           </a:ln>
         </p:spPr>
+        <p:txBody>
+          <a:bodyPr/>
+          <a:p/>
+        </p:txBody>
       </p:sp>
       <p:sp>
         <p:nvSpPr>
@@ -15473,6 +15993,10 @@
             <a:prstDash val="solid"/>
           </a:ln>
         </p:spPr>
+        <p:txBody>
+          <a:bodyPr/>
+          <a:p/>
+        </p:txBody>
       </p:sp>
       <p:sp>
         <p:nvSpPr>
@@ -15689,6 +16213,10 @@
             <a:prstDash val="solid"/>
           </a:ln>
         </p:spPr>
+        <p:txBody>
+          <a:bodyPr/>
+          <a:p/>
+        </p:txBody>
       </p:sp>
       <p:sp>
         <p:nvSpPr>
@@ -15716,6 +16244,10 @@
             <a:prstDash val="solid"/>
           </a:ln>
         </p:spPr>
+        <p:txBody>
+          <a:bodyPr/>
+          <a:p/>
+        </p:txBody>
       </p:sp>
       <p:sp>
         <p:nvSpPr>
@@ -15745,6 +16277,10 @@
             <a:prstDash val="solid"/>
           </a:ln>
         </p:spPr>
+        <p:txBody>
+          <a:bodyPr/>
+          <a:p/>
+        </p:txBody>
       </p:sp>
       <p:sp>
         <p:nvSpPr>
@@ -15961,6 +16497,10 @@
             <a:prstDash val="solid"/>
           </a:ln>
         </p:spPr>
+        <p:txBody>
+          <a:bodyPr/>
+          <a:p/>
+        </p:txBody>
       </p:sp>
       <p:sp>
         <p:nvSpPr>
@@ -15988,6 +16528,10 @@
             <a:prstDash val="solid"/>
           </a:ln>
         </p:spPr>
+        <p:txBody>
+          <a:bodyPr/>
+          <a:p/>
+        </p:txBody>
       </p:sp>
       <p:sp>
         <p:nvSpPr>
@@ -16017,6 +16561,10 @@
             <a:prstDash val="solid"/>
           </a:ln>
         </p:spPr>
+        <p:txBody>
+          <a:bodyPr/>
+          <a:p/>
+        </p:txBody>
       </p:sp>
       <p:sp>
         <p:nvSpPr>
@@ -16233,6 +16781,10 @@
             <a:prstDash val="solid"/>
           </a:ln>
         </p:spPr>
+        <p:txBody>
+          <a:bodyPr/>
+          <a:p/>
+        </p:txBody>
       </p:sp>
       <p:sp>
         <p:nvSpPr>
@@ -16262,6 +16814,10 @@
             <a:prstDash val="solid"/>
           </a:ln>
         </p:spPr>
+        <p:txBody>
+          <a:bodyPr/>
+          <a:p/>
+        </p:txBody>
       </p:sp>
       <p:sp>
         <p:nvSpPr>
@@ -16329,6 +16885,10 @@
             <a:prstDash val="solid"/>
           </a:ln>
         </p:spPr>
+        <p:txBody>
+          <a:bodyPr/>
+          <a:p/>
+        </p:txBody>
       </p:sp>
       <p:sp>
         <p:nvSpPr>
@@ -16425,6 +16985,10 @@
             <a:prstDash val="solid"/>
           </a:ln>
         </p:spPr>
+        <p:txBody>
+          <a:bodyPr/>
+          <a:p/>
+        </p:txBody>
       </p:sp>
       <p:sp>
         <p:nvSpPr>
@@ -16452,6 +17016,10 @@
             <a:prstDash val="solid"/>
           </a:ln>
         </p:spPr>
+        <p:txBody>
+          <a:bodyPr/>
+          <a:p/>
+        </p:txBody>
       </p:sp>
       <p:sp>
         <p:nvSpPr>
@@ -16479,6 +17047,10 @@
             <a:prstDash val="solid"/>
           </a:ln>
         </p:spPr>
+        <p:txBody>
+          <a:bodyPr/>
+          <a:p/>
+        </p:txBody>
       </p:sp>
       <p:pic>
         <p:nvPicPr>
@@ -16823,6 +17395,10 @@
             <a:prstDash val="solid"/>
           </a:ln>
         </p:spPr>
+        <p:txBody>
+          <a:bodyPr/>
+          <a:p/>
+        </p:txBody>
       </p:sp>
       <p:sp>
         <p:nvSpPr>
@@ -16862,7 +17438,7 @@
                 <a:ea typeface="Inter" pitchFamily="34" charset="-122"/>
                 <a:cs typeface="Inter" pitchFamily="34" charset="-120"/>
               </a:rPr>
-              <a:t>© 2026 Julian Krauß  ·  JK-CD-DE-2026-003  ·  Bernd-Blindow-Schulen Ravensburg</a:t>
+              <a:t>© 2026 Julian Krauß  ·  JK AXIS | GOLD MASTER  ·  Bernd-Blindow-Schulen Ravensburg</a:t>
             </a:r>
             <a:endParaRPr lang="en-US" sz="760" dirty="0"/>
           </a:p>
@@ -16940,6 +17516,10 @@
             <a:prstDash val="solid"/>
           </a:ln>
         </p:spPr>
+        <p:txBody>
+          <a:bodyPr/>
+          <a:p/>
+        </p:txBody>
       </p:sp>
       <p:sp>
         <p:nvSpPr>
@@ -17013,6 +17593,10 @@
             <a:prstDash val="solid"/>
           </a:ln>
         </p:spPr>
+        <p:txBody>
+          <a:bodyPr/>
+          <a:p/>
+        </p:txBody>
       </p:sp>
       <p:sp>
         <p:nvSpPr>
@@ -17086,6 +17670,10 @@
             <a:prstDash val="solid"/>
           </a:ln>
         </p:spPr>
+        <p:txBody>
+          <a:bodyPr/>
+          <a:p/>
+        </p:txBody>
       </p:sp>
       <p:sp>
         <p:nvSpPr>
@@ -17159,6 +17747,10 @@
             <a:prstDash val="solid"/>
           </a:ln>
         </p:spPr>
+        <p:txBody>
+          <a:bodyPr/>
+          <a:p/>
+        </p:txBody>
       </p:sp>
       <p:sp>
         <p:nvSpPr>
@@ -17232,6 +17824,10 @@
             <a:prstDash val="solid"/>
           </a:ln>
         </p:spPr>
+        <p:txBody>
+          <a:bodyPr/>
+          <a:p/>
+        </p:txBody>
       </p:sp>
       <p:sp>
         <p:nvSpPr>
@@ -17303,6 +17899,10 @@
             <a:prstDash val="solid"/>
           </a:ln>
         </p:spPr>
+        <p:txBody>
+          <a:bodyPr/>
+          <a:p/>
+        </p:txBody>
       </p:sp>
       <p:sp>
         <p:nvSpPr>
@@ -17330,6 +17930,10 @@
             <a:prstDash val="solid"/>
           </a:ln>
         </p:spPr>
+        <p:txBody>
+          <a:bodyPr/>
+          <a:p/>
+        </p:txBody>
       </p:sp>
       <p:sp>
         <p:nvSpPr>
@@ -17445,6 +18049,10 @@
             <a:prstDash val="solid"/>
           </a:ln>
         </p:spPr>
+        <p:txBody>
+          <a:bodyPr/>
+          <a:p/>
+        </p:txBody>
       </p:sp>
       <p:sp>
         <p:nvSpPr>
@@ -17472,6 +18080,10 @@
             <a:prstDash val="solid"/>
           </a:ln>
         </p:spPr>
+        <p:txBody>
+          <a:bodyPr/>
+          <a:p/>
+        </p:txBody>
       </p:sp>
       <p:sp>
         <p:nvSpPr>
@@ -17613,6 +18225,10 @@
             <a:prstDash val="solid"/>
           </a:ln>
         </p:spPr>
+        <p:txBody>
+          <a:bodyPr/>
+          <a:p/>
+        </p:txBody>
       </p:sp>
       <p:sp>
         <p:nvSpPr>
@@ -17709,6 +18325,10 @@
             <a:prstDash val="solid"/>
           </a:ln>
         </p:spPr>
+        <p:txBody>
+          <a:bodyPr/>
+          <a:p/>
+        </p:txBody>
       </p:sp>
       <p:sp>
         <p:nvSpPr>
@@ -17736,6 +18356,10 @@
             <a:prstDash val="solid"/>
           </a:ln>
         </p:spPr>
+        <p:txBody>
+          <a:bodyPr/>
+          <a:p/>
+        </p:txBody>
       </p:sp>
       <p:sp>
         <p:nvSpPr>
@@ -17763,6 +18387,10 @@
             <a:prstDash val="solid"/>
           </a:ln>
         </p:spPr>
+        <p:txBody>
+          <a:bodyPr/>
+          <a:p/>
+        </p:txBody>
       </p:sp>
       <p:pic>
         <p:nvPicPr>
@@ -18107,6 +18735,10 @@
             <a:prstDash val="solid"/>
           </a:ln>
         </p:spPr>
+        <p:txBody>
+          <a:bodyPr/>
+          <a:p/>
+        </p:txBody>
       </p:sp>
       <p:sp>
         <p:nvSpPr>
@@ -18146,7 +18778,7 @@
                 <a:ea typeface="Inter" pitchFamily="34" charset="-122"/>
                 <a:cs typeface="Inter" pitchFamily="34" charset="-120"/>
               </a:rPr>
-              <a:t>© 2026 Julian Krauß  ·  JK-CD-DE-2026-003  ·  Bernd-Blindow-Schulen Ravensburg</a:t>
+              <a:t>© 2026 Julian Krauß  ·  JK AXIS | GOLD MASTER  ·  Bernd-Blindow-Schulen Ravensburg</a:t>
             </a:r>
             <a:endParaRPr lang="en-US" sz="760" dirty="0"/>
           </a:p>
@@ -18224,6 +18856,10 @@
             <a:prstDash val="solid"/>
           </a:ln>
         </p:spPr>
+        <p:txBody>
+          <a:bodyPr/>
+          <a:p/>
+        </p:txBody>
       </p:sp>
       <p:sp>
         <p:nvSpPr>
@@ -18297,6 +18933,10 @@
             <a:prstDash val="solid"/>
           </a:ln>
         </p:spPr>
+        <p:txBody>
+          <a:bodyPr/>
+          <a:p/>
+        </p:txBody>
       </p:sp>
       <p:sp>
         <p:nvSpPr>
@@ -18370,6 +19010,10 @@
             <a:prstDash val="solid"/>
           </a:ln>
         </p:spPr>
+        <p:txBody>
+          <a:bodyPr/>
+          <a:p/>
+        </p:txBody>
       </p:sp>
       <p:sp>
         <p:nvSpPr>
@@ -18443,6 +19087,10 @@
             <a:prstDash val="solid"/>
           </a:ln>
         </p:spPr>
+        <p:txBody>
+          <a:bodyPr/>
+          <a:p/>
+        </p:txBody>
       </p:sp>
       <p:sp>
         <p:nvSpPr>
@@ -18516,6 +19164,10 @@
             <a:prstDash val="solid"/>
           </a:ln>
         </p:spPr>
+        <p:txBody>
+          <a:bodyPr/>
+          <a:p/>
+        </p:txBody>
       </p:sp>
       <p:sp>
         <p:nvSpPr>
@@ -18633,6 +19285,10 @@
             <a:prstDash val="solid"/>
           </a:ln>
         </p:spPr>
+        <p:txBody>
+          <a:bodyPr/>
+          <a:p/>
+        </p:txBody>
       </p:sp>
       <p:sp>
         <p:nvSpPr>
@@ -18658,6 +19314,10 @@
             <a:prstDash val="solid"/>
           </a:ln>
         </p:spPr>
+        <p:txBody>
+          <a:bodyPr/>
+          <a:p/>
+        </p:txBody>
       </p:sp>
       <p:sp>
         <p:nvSpPr>
@@ -18683,6 +19343,10 @@
             <a:prstDash val="solid"/>
           </a:ln>
         </p:spPr>
+        <p:txBody>
+          <a:bodyPr/>
+          <a:p/>
+        </p:txBody>
       </p:sp>
       <p:sp>
         <p:nvSpPr>
@@ -18708,6 +19372,10 @@
             <a:prstDash val="solid"/>
           </a:ln>
         </p:spPr>
+        <p:txBody>
+          <a:bodyPr/>
+          <a:p/>
+        </p:txBody>
       </p:sp>
       <p:sp>
         <p:nvSpPr>
@@ -18733,6 +19401,10 @@
             <a:prstDash val="solid"/>
           </a:ln>
         </p:spPr>
+        <p:txBody>
+          <a:bodyPr/>
+          <a:p/>
+        </p:txBody>
       </p:sp>
       <p:sp>
         <p:nvSpPr>
@@ -18758,6 +19430,10 @@
             <a:prstDash val="solid"/>
           </a:ln>
         </p:spPr>
+        <p:txBody>
+          <a:bodyPr/>
+          <a:p/>
+        </p:txBody>
       </p:sp>
       <p:sp>
         <p:nvSpPr>
@@ -18783,6 +19459,10 @@
             <a:prstDash val="solid"/>
           </a:ln>
         </p:spPr>
+        <p:txBody>
+          <a:bodyPr/>
+          <a:p/>
+        </p:txBody>
       </p:sp>
       <p:sp>
         <p:nvSpPr>
@@ -18808,6 +19488,10 @@
             <a:prstDash val="solid"/>
           </a:ln>
         </p:spPr>
+        <p:txBody>
+          <a:bodyPr/>
+          <a:p/>
+        </p:txBody>
       </p:sp>
       <p:sp>
         <p:nvSpPr>
@@ -18833,6 +19517,10 @@
             <a:prstDash val="solid"/>
           </a:ln>
         </p:spPr>
+        <p:txBody>
+          <a:bodyPr/>
+          <a:p/>
+        </p:txBody>
       </p:sp>
       <p:sp>
         <p:nvSpPr>
@@ -18858,6 +19546,10 @@
             <a:prstDash val="solid"/>
           </a:ln>
         </p:spPr>
+        <p:txBody>
+          <a:bodyPr/>
+          <a:p/>
+        </p:txBody>
       </p:sp>
       <p:sp>
         <p:nvSpPr>
@@ -18883,6 +19575,10 @@
             <a:prstDash val="solid"/>
           </a:ln>
         </p:spPr>
+        <p:txBody>
+          <a:bodyPr/>
+          <a:p/>
+        </p:txBody>
       </p:sp>
       <p:sp>
         <p:nvSpPr>
@@ -18908,6 +19604,10 @@
             <a:prstDash val="solid"/>
           </a:ln>
         </p:spPr>
+        <p:txBody>
+          <a:bodyPr/>
+          <a:p/>
+        </p:txBody>
       </p:sp>
       <p:sp>
         <p:nvSpPr>
@@ -18933,6 +19633,10 @@
             <a:prstDash val="solid"/>
           </a:ln>
         </p:spPr>
+        <p:txBody>
+          <a:bodyPr/>
+          <a:p/>
+        </p:txBody>
       </p:sp>
       <p:sp>
         <p:nvSpPr>
@@ -18958,6 +19662,10 @@
             <a:prstDash val="solid"/>
           </a:ln>
         </p:spPr>
+        <p:txBody>
+          <a:bodyPr/>
+          <a:p/>
+        </p:txBody>
       </p:sp>
       <p:sp>
         <p:nvSpPr>
@@ -18983,6 +19691,10 @@
             <a:prstDash val="solid"/>
           </a:ln>
         </p:spPr>
+        <p:txBody>
+          <a:bodyPr/>
+          <a:p/>
+        </p:txBody>
       </p:sp>
       <p:sp>
         <p:nvSpPr>
@@ -19008,6 +19720,10 @@
             <a:prstDash val="solid"/>
           </a:ln>
         </p:spPr>
+        <p:txBody>
+          <a:bodyPr/>
+          <a:p/>
+        </p:txBody>
       </p:sp>
       <p:sp>
         <p:nvSpPr>
@@ -19033,6 +19749,10 @@
             <a:prstDash val="solid"/>
           </a:ln>
         </p:spPr>
+        <p:txBody>
+          <a:bodyPr/>
+          <a:p/>
+        </p:txBody>
       </p:sp>
       <p:sp>
         <p:nvSpPr>
@@ -19058,6 +19778,10 @@
             <a:prstDash val="solid"/>
           </a:ln>
         </p:spPr>
+        <p:txBody>
+          <a:bodyPr/>
+          <a:p/>
+        </p:txBody>
       </p:sp>
       <p:sp>
         <p:nvSpPr>
@@ -19083,6 +19807,10 @@
             <a:prstDash val="solid"/>
           </a:ln>
         </p:spPr>
+        <p:txBody>
+          <a:bodyPr/>
+          <a:p/>
+        </p:txBody>
       </p:sp>
       <p:sp>
         <p:nvSpPr>
@@ -19108,6 +19836,10 @@
             <a:prstDash val="solid"/>
           </a:ln>
         </p:spPr>
+        <p:txBody>
+          <a:bodyPr/>
+          <a:p/>
+        </p:txBody>
       </p:sp>
       <p:sp>
         <p:nvSpPr>
@@ -19133,6 +19865,10 @@
             <a:prstDash val="solid"/>
           </a:ln>
         </p:spPr>
+        <p:txBody>
+          <a:bodyPr/>
+          <a:p/>
+        </p:txBody>
       </p:sp>
       <p:sp>
         <p:nvSpPr>
@@ -19158,6 +19894,10 @@
             <a:prstDash val="solid"/>
           </a:ln>
         </p:spPr>
+        <p:txBody>
+          <a:bodyPr/>
+          <a:p/>
+        </p:txBody>
       </p:sp>
       <p:sp>
         <p:nvSpPr>
@@ -19183,6 +19923,10 @@
             <a:prstDash val="solid"/>
           </a:ln>
         </p:spPr>
+        <p:txBody>
+          <a:bodyPr/>
+          <a:p/>
+        </p:txBody>
       </p:sp>
       <p:sp>
         <p:nvSpPr>
@@ -19208,6 +19952,10 @@
             <a:prstDash val="solid"/>
           </a:ln>
         </p:spPr>
+        <p:txBody>
+          <a:bodyPr/>
+          <a:p/>
+        </p:txBody>
       </p:sp>
       <p:sp>
         <p:nvSpPr>
@@ -19233,6 +19981,10 @@
             <a:prstDash val="solid"/>
           </a:ln>
         </p:spPr>
+        <p:txBody>
+          <a:bodyPr/>
+          <a:p/>
+        </p:txBody>
       </p:sp>
       <p:sp>
         <p:nvSpPr>
@@ -19258,6 +20010,10 @@
             <a:prstDash val="solid"/>
           </a:ln>
         </p:spPr>
+        <p:txBody>
+          <a:bodyPr/>
+          <a:p/>
+        </p:txBody>
       </p:sp>
       <p:sp>
         <p:nvSpPr>
@@ -19283,6 +20039,10 @@
             <a:prstDash val="solid"/>
           </a:ln>
         </p:spPr>
+        <p:txBody>
+          <a:bodyPr/>
+          <a:p/>
+        </p:txBody>
       </p:sp>
       <p:sp>
         <p:nvSpPr>
@@ -19308,6 +20068,10 @@
             <a:prstDash val="solid"/>
           </a:ln>
         </p:spPr>
+        <p:txBody>
+          <a:bodyPr/>
+          <a:p/>
+        </p:txBody>
       </p:sp>
       <p:sp>
         <p:nvSpPr>
@@ -19333,6 +20097,10 @@
             <a:prstDash val="solid"/>
           </a:ln>
         </p:spPr>
+        <p:txBody>
+          <a:bodyPr/>
+          <a:p/>
+        </p:txBody>
       </p:sp>
       <p:sp>
         <p:nvSpPr>
@@ -19358,6 +20126,10 @@
             <a:prstDash val="solid"/>
           </a:ln>
         </p:spPr>
+        <p:txBody>
+          <a:bodyPr/>
+          <a:p/>
+        </p:txBody>
       </p:sp>
       <p:sp>
         <p:nvSpPr>
@@ -19383,6 +20155,10 @@
             <a:prstDash val="solid"/>
           </a:ln>
         </p:spPr>
+        <p:txBody>
+          <a:bodyPr/>
+          <a:p/>
+        </p:txBody>
       </p:sp>
       <p:sp>
         <p:nvSpPr>
@@ -19408,6 +20184,10 @@
             <a:prstDash val="solid"/>
           </a:ln>
         </p:spPr>
+        <p:txBody>
+          <a:bodyPr/>
+          <a:p/>
+        </p:txBody>
       </p:sp>
       <p:sp>
         <p:nvSpPr>
@@ -19433,6 +20213,10 @@
             <a:prstDash val="solid"/>
           </a:ln>
         </p:spPr>
+        <p:txBody>
+          <a:bodyPr/>
+          <a:p/>
+        </p:txBody>
       </p:sp>
       <p:sp>
         <p:nvSpPr>
@@ -19458,6 +20242,10 @@
             <a:prstDash val="solid"/>
           </a:ln>
         </p:spPr>
+        <p:txBody>
+          <a:bodyPr/>
+          <a:p/>
+        </p:txBody>
       </p:sp>
       <p:sp>
         <p:nvSpPr>
@@ -19483,6 +20271,10 @@
             <a:prstDash val="solid"/>
           </a:ln>
         </p:spPr>
+        <p:txBody>
+          <a:bodyPr/>
+          <a:p/>
+        </p:txBody>
       </p:sp>
       <p:sp>
         <p:nvSpPr>
@@ -19508,6 +20300,10 @@
             <a:prstDash val="solid"/>
           </a:ln>
         </p:spPr>
+        <p:txBody>
+          <a:bodyPr/>
+          <a:p/>
+        </p:txBody>
       </p:sp>
       <p:sp>
         <p:nvSpPr>
@@ -19533,6 +20329,10 @@
             <a:prstDash val="solid"/>
           </a:ln>
         </p:spPr>
+        <p:txBody>
+          <a:bodyPr/>
+          <a:p/>
+        </p:txBody>
       </p:sp>
       <p:sp>
         <p:nvSpPr>
@@ -19558,6 +20358,10 @@
             <a:prstDash val="solid"/>
           </a:ln>
         </p:spPr>
+        <p:txBody>
+          <a:bodyPr/>
+          <a:p/>
+        </p:txBody>
       </p:sp>
       <p:sp>
         <p:nvSpPr>
@@ -19583,6 +20387,10 @@
             <a:prstDash val="solid"/>
           </a:ln>
         </p:spPr>
+        <p:txBody>
+          <a:bodyPr/>
+          <a:p/>
+        </p:txBody>
       </p:sp>
       <p:sp>
         <p:nvSpPr>
@@ -19608,6 +20416,10 @@
             <a:prstDash val="solid"/>
           </a:ln>
         </p:spPr>
+        <p:txBody>
+          <a:bodyPr/>
+          <a:p/>
+        </p:txBody>
       </p:sp>
       <p:sp>
         <p:nvSpPr>
@@ -19633,6 +20445,10 @@
             <a:prstDash val="solid"/>
           </a:ln>
         </p:spPr>
+        <p:txBody>
+          <a:bodyPr/>
+          <a:p/>
+        </p:txBody>
       </p:sp>
       <p:sp>
         <p:nvSpPr>
@@ -19658,6 +20474,10 @@
             <a:prstDash val="solid"/>
           </a:ln>
         </p:spPr>
+        <p:txBody>
+          <a:bodyPr/>
+          <a:p/>
+        </p:txBody>
       </p:sp>
       <p:sp>
         <p:nvSpPr>
@@ -19683,6 +20503,10 @@
             <a:prstDash val="solid"/>
           </a:ln>
         </p:spPr>
+        <p:txBody>
+          <a:bodyPr/>
+          <a:p/>
+        </p:txBody>
       </p:sp>
       <p:sp>
         <p:nvSpPr>
@@ -19800,6 +20624,10 @@
             <a:prstDash val="solid"/>
           </a:ln>
         </p:spPr>
+        <p:txBody>
+          <a:bodyPr/>
+          <a:p/>
+        </p:txBody>
       </p:sp>
       <p:sp>
         <p:nvSpPr>
@@ -19825,6 +20653,10 @@
             <a:prstDash val="solid"/>
           </a:ln>
         </p:spPr>
+        <p:txBody>
+          <a:bodyPr/>
+          <a:p/>
+        </p:txBody>
       </p:sp>
       <p:sp>
         <p:nvSpPr>
@@ -19850,6 +20682,10 @@
             <a:prstDash val="solid"/>
           </a:ln>
         </p:spPr>
+        <p:txBody>
+          <a:bodyPr/>
+          <a:p/>
+        </p:txBody>
       </p:sp>
       <p:sp>
         <p:nvSpPr>
@@ -19875,6 +20711,10 @@
             <a:prstDash val="solid"/>
           </a:ln>
         </p:spPr>
+        <p:txBody>
+          <a:bodyPr/>
+          <a:p/>
+        </p:txBody>
       </p:sp>
       <p:sp>
         <p:nvSpPr>
@@ -19900,6 +20740,10 @@
             <a:prstDash val="solid"/>
           </a:ln>
         </p:spPr>
+        <p:txBody>
+          <a:bodyPr/>
+          <a:p/>
+        </p:txBody>
       </p:sp>
       <p:sp>
         <p:nvSpPr>
@@ -19925,6 +20769,10 @@
             <a:prstDash val="solid"/>
           </a:ln>
         </p:spPr>
+        <p:txBody>
+          <a:bodyPr/>
+          <a:p/>
+        </p:txBody>
       </p:sp>
       <p:sp>
         <p:nvSpPr>
@@ -19950,6 +20798,10 @@
             <a:prstDash val="solid"/>
           </a:ln>
         </p:spPr>
+        <p:txBody>
+          <a:bodyPr/>
+          <a:p/>
+        </p:txBody>
       </p:sp>
       <p:sp>
         <p:nvSpPr>
@@ -19975,6 +20827,10 @@
             <a:prstDash val="solid"/>
           </a:ln>
         </p:spPr>
+        <p:txBody>
+          <a:bodyPr/>
+          <a:p/>
+        </p:txBody>
       </p:sp>
       <p:sp>
         <p:nvSpPr>
@@ -20000,6 +20856,10 @@
             <a:prstDash val="solid"/>
           </a:ln>
         </p:spPr>
+        <p:txBody>
+          <a:bodyPr/>
+          <a:p/>
+        </p:txBody>
       </p:sp>
       <p:sp>
         <p:nvSpPr>
@@ -20025,6 +20885,10 @@
             <a:prstDash val="solid"/>
           </a:ln>
         </p:spPr>
+        <p:txBody>
+          <a:bodyPr/>
+          <a:p/>
+        </p:txBody>
       </p:sp>
       <p:sp>
         <p:nvSpPr>
@@ -20050,6 +20914,10 @@
             <a:prstDash val="solid"/>
           </a:ln>
         </p:spPr>
+        <p:txBody>
+          <a:bodyPr/>
+          <a:p/>
+        </p:txBody>
       </p:sp>
       <p:sp>
         <p:nvSpPr>
@@ -20075,6 +20943,10 @@
             <a:prstDash val="solid"/>
           </a:ln>
         </p:spPr>
+        <p:txBody>
+          <a:bodyPr/>
+          <a:p/>
+        </p:txBody>
       </p:sp>
       <p:sp>
         <p:nvSpPr>
@@ -20100,6 +20972,10 @@
             <a:prstDash val="solid"/>
           </a:ln>
         </p:spPr>
+        <p:txBody>
+          <a:bodyPr/>
+          <a:p/>
+        </p:txBody>
       </p:sp>
       <p:sp>
         <p:nvSpPr>
@@ -20125,6 +21001,10 @@
             <a:prstDash val="solid"/>
           </a:ln>
         </p:spPr>
+        <p:txBody>
+          <a:bodyPr/>
+          <a:p/>
+        </p:txBody>
       </p:sp>
       <p:sp>
         <p:nvSpPr>
@@ -20150,6 +21030,10 @@
             <a:prstDash val="solid"/>
           </a:ln>
         </p:spPr>
+        <p:txBody>
+          <a:bodyPr/>
+          <a:p/>
+        </p:txBody>
       </p:sp>
       <p:sp>
         <p:nvSpPr>
@@ -20175,6 +21059,10 @@
             <a:prstDash val="solid"/>
           </a:ln>
         </p:spPr>
+        <p:txBody>
+          <a:bodyPr/>
+          <a:p/>
+        </p:txBody>
       </p:sp>
       <p:sp>
         <p:nvSpPr>
@@ -20200,6 +21088,10 @@
             <a:prstDash val="solid"/>
           </a:ln>
         </p:spPr>
+        <p:txBody>
+          <a:bodyPr/>
+          <a:p/>
+        </p:txBody>
       </p:sp>
       <p:sp>
         <p:nvSpPr>
@@ -20225,6 +21117,10 @@
             <a:prstDash val="solid"/>
           </a:ln>
         </p:spPr>
+        <p:txBody>
+          <a:bodyPr/>
+          <a:p/>
+        </p:txBody>
       </p:sp>
       <p:sp>
         <p:nvSpPr>
@@ -20250,6 +21146,10 @@
             <a:prstDash val="solid"/>
           </a:ln>
         </p:spPr>
+        <p:txBody>
+          <a:bodyPr/>
+          <a:p/>
+        </p:txBody>
       </p:sp>
       <p:sp>
         <p:nvSpPr>
@@ -20275,6 +21175,10 @@
             <a:prstDash val="solid"/>
           </a:ln>
         </p:spPr>
+        <p:txBody>
+          <a:bodyPr/>
+          <a:p/>
+        </p:txBody>
       </p:sp>
       <p:sp>
         <p:nvSpPr>
@@ -20300,6 +21204,10 @@
             <a:prstDash val="solid"/>
           </a:ln>
         </p:spPr>
+        <p:txBody>
+          <a:bodyPr/>
+          <a:p/>
+        </p:txBody>
       </p:sp>
       <p:sp>
         <p:nvSpPr>
@@ -20325,6 +21233,10 @@
             <a:prstDash val="solid"/>
           </a:ln>
         </p:spPr>
+        <p:txBody>
+          <a:bodyPr/>
+          <a:p/>
+        </p:txBody>
       </p:sp>
       <p:sp>
         <p:nvSpPr>
@@ -20350,6 +21262,10 @@
             <a:prstDash val="solid"/>
           </a:ln>
         </p:spPr>
+        <p:txBody>
+          <a:bodyPr/>
+          <a:p/>
+        </p:txBody>
       </p:sp>
       <p:sp>
         <p:nvSpPr>
@@ -20375,6 +21291,10 @@
             <a:prstDash val="solid"/>
           </a:ln>
         </p:spPr>
+        <p:txBody>
+          <a:bodyPr/>
+          <a:p/>
+        </p:txBody>
       </p:sp>
       <p:sp>
         <p:nvSpPr>
@@ -20400,6 +21320,10 @@
             <a:prstDash val="solid"/>
           </a:ln>
         </p:spPr>
+        <p:txBody>
+          <a:bodyPr/>
+          <a:p/>
+        </p:txBody>
       </p:sp>
       <p:sp>
         <p:nvSpPr>
@@ -20425,6 +21349,10 @@
             <a:prstDash val="solid"/>
           </a:ln>
         </p:spPr>
+        <p:txBody>
+          <a:bodyPr/>
+          <a:p/>
+        </p:txBody>
       </p:sp>
       <p:sp>
         <p:nvSpPr>
@@ -20450,6 +21378,10 @@
             <a:prstDash val="solid"/>
           </a:ln>
         </p:spPr>
+        <p:txBody>
+          <a:bodyPr/>
+          <a:p/>
+        </p:txBody>
       </p:sp>
       <p:sp>
         <p:nvSpPr>
@@ -20475,6 +21407,10 @@
             <a:prstDash val="solid"/>
           </a:ln>
         </p:spPr>
+        <p:txBody>
+          <a:bodyPr/>
+          <a:p/>
+        </p:txBody>
       </p:sp>
       <p:sp>
         <p:nvSpPr>
@@ -20500,6 +21436,10 @@
             <a:prstDash val="solid"/>
           </a:ln>
         </p:spPr>
+        <p:txBody>
+          <a:bodyPr/>
+          <a:p/>
+        </p:txBody>
       </p:sp>
       <p:sp>
         <p:nvSpPr>
@@ -20525,6 +21465,10 @@
             <a:prstDash val="solid"/>
           </a:ln>
         </p:spPr>
+        <p:txBody>
+          <a:bodyPr/>
+          <a:p/>
+        </p:txBody>
       </p:sp>
       <p:sp>
         <p:nvSpPr>
@@ -20550,6 +21494,10 @@
             <a:prstDash val="solid"/>
           </a:ln>
         </p:spPr>
+        <p:txBody>
+          <a:bodyPr/>
+          <a:p/>
+        </p:txBody>
       </p:sp>
       <p:sp>
         <p:nvSpPr>
@@ -20575,6 +21523,10 @@
             <a:prstDash val="solid"/>
           </a:ln>
         </p:spPr>
+        <p:txBody>
+          <a:bodyPr/>
+          <a:p/>
+        </p:txBody>
       </p:sp>
       <p:sp>
         <p:nvSpPr>
@@ -20600,6 +21552,10 @@
             <a:prstDash val="solid"/>
           </a:ln>
         </p:spPr>
+        <p:txBody>
+          <a:bodyPr/>
+          <a:p/>
+        </p:txBody>
       </p:sp>
       <p:sp>
         <p:nvSpPr>
@@ -20625,6 +21581,10 @@
             <a:prstDash val="solid"/>
           </a:ln>
         </p:spPr>
+        <p:txBody>
+          <a:bodyPr/>
+          <a:p/>
+        </p:txBody>
       </p:sp>
       <p:sp>
         <p:nvSpPr>
@@ -20650,6 +21610,10 @@
             <a:prstDash val="solid"/>
           </a:ln>
         </p:spPr>
+        <p:txBody>
+          <a:bodyPr/>
+          <a:p/>
+        </p:txBody>
       </p:sp>
       <p:sp>
         <p:nvSpPr>
@@ -20675,6 +21639,10 @@
             <a:prstDash val="solid"/>
           </a:ln>
         </p:spPr>
+        <p:txBody>
+          <a:bodyPr/>
+          <a:p/>
+        </p:txBody>
       </p:sp>
       <p:sp>
         <p:nvSpPr>
@@ -20700,6 +21668,10 @@
             <a:prstDash val="solid"/>
           </a:ln>
         </p:spPr>
+        <p:txBody>
+          <a:bodyPr/>
+          <a:p/>
+        </p:txBody>
       </p:sp>
       <p:sp>
         <p:nvSpPr>
@@ -20725,6 +21697,10 @@
             <a:prstDash val="solid"/>
           </a:ln>
         </p:spPr>
+        <p:txBody>
+          <a:bodyPr/>
+          <a:p/>
+        </p:txBody>
       </p:sp>
       <p:sp>
         <p:nvSpPr>
@@ -20750,6 +21726,10 @@
             <a:prstDash val="solid"/>
           </a:ln>
         </p:spPr>
+        <p:txBody>
+          <a:bodyPr/>
+          <a:p/>
+        </p:txBody>
       </p:sp>
       <p:sp>
         <p:nvSpPr>
@@ -20775,6 +21755,10 @@
             <a:prstDash val="solid"/>
           </a:ln>
         </p:spPr>
+        <p:txBody>
+          <a:bodyPr/>
+          <a:p/>
+        </p:txBody>
       </p:sp>
       <p:sp>
         <p:nvSpPr>
@@ -20800,6 +21784,10 @@
             <a:prstDash val="solid"/>
           </a:ln>
         </p:spPr>
+        <p:txBody>
+          <a:bodyPr/>
+          <a:p/>
+        </p:txBody>
       </p:sp>
       <p:sp>
         <p:nvSpPr>
@@ -20825,6 +21813,10 @@
             <a:prstDash val="solid"/>
           </a:ln>
         </p:spPr>
+        <p:txBody>
+          <a:bodyPr/>
+          <a:p/>
+        </p:txBody>
       </p:sp>
       <p:sp>
         <p:nvSpPr>
@@ -20850,6 +21842,10 @@
             <a:prstDash val="solid"/>
           </a:ln>
         </p:spPr>
+        <p:txBody>
+          <a:bodyPr/>
+          <a:p/>
+        </p:txBody>
       </p:sp>
       <p:sp>
         <p:nvSpPr>
@@ -20875,6 +21871,10 @@
             <a:prstDash val="solid"/>
           </a:ln>
         </p:spPr>
+        <p:txBody>
+          <a:bodyPr/>
+          <a:p/>
+        </p:txBody>
       </p:sp>
       <p:sp>
         <p:nvSpPr>
@@ -20900,6 +21900,10 @@
             <a:prstDash val="solid"/>
           </a:ln>
         </p:spPr>
+        <p:txBody>
+          <a:bodyPr/>
+          <a:p/>
+        </p:txBody>
       </p:sp>
       <p:sp>
         <p:nvSpPr>
@@ -20925,6 +21929,10 @@
             <a:prstDash val="solid"/>
           </a:ln>
         </p:spPr>
+        <p:txBody>
+          <a:bodyPr/>
+          <a:p/>
+        </p:txBody>
       </p:sp>
       <p:sp>
         <p:nvSpPr>
@@ -20950,6 +21958,10 @@
             <a:prstDash val="solid"/>
           </a:ln>
         </p:spPr>
+        <p:txBody>
+          <a:bodyPr/>
+          <a:p/>
+        </p:txBody>
       </p:sp>
       <p:sp>
         <p:nvSpPr>
@@ -20975,6 +21987,10 @@
             <a:prstDash val="solid"/>
           </a:ln>
         </p:spPr>
+        <p:txBody>
+          <a:bodyPr/>
+          <a:p/>
+        </p:txBody>
       </p:sp>
       <p:sp>
         <p:nvSpPr>
@@ -21000,6 +22016,10 @@
             <a:prstDash val="solid"/>
           </a:ln>
         </p:spPr>
+        <p:txBody>
+          <a:bodyPr/>
+          <a:p/>
+        </p:txBody>
       </p:sp>
       <p:sp>
         <p:nvSpPr>
@@ -21025,6 +22045,10 @@
             <a:prstDash val="solid"/>
           </a:ln>
         </p:spPr>
+        <p:txBody>
+          <a:bodyPr/>
+          <a:p/>
+        </p:txBody>
       </p:sp>
       <p:sp>
         <p:nvSpPr>
@@ -21050,6 +22074,10 @@
             <a:prstDash val="solid"/>
           </a:ln>
         </p:spPr>
+        <p:txBody>
+          <a:bodyPr/>
+          <a:p/>
+        </p:txBody>
       </p:sp>
       <p:sp>
         <p:nvSpPr>
@@ -21075,6 +22103,10 @@
             <a:prstDash val="solid"/>
           </a:ln>
         </p:spPr>
+        <p:txBody>
+          <a:bodyPr/>
+          <a:p/>
+        </p:txBody>
       </p:sp>
       <p:sp>
         <p:nvSpPr>
@@ -21100,6 +22132,10 @@
             <a:prstDash val="solid"/>
           </a:ln>
         </p:spPr>
+        <p:txBody>
+          <a:bodyPr/>
+          <a:p/>
+        </p:txBody>
       </p:sp>
       <p:sp>
         <p:nvSpPr>
@@ -21125,6 +22161,10 @@
             <a:prstDash val="solid"/>
           </a:ln>
         </p:spPr>
+        <p:txBody>
+          <a:bodyPr/>
+          <a:p/>
+        </p:txBody>
       </p:sp>
       <p:sp>
         <p:nvSpPr>
@@ -21150,6 +22190,10 @@
             <a:prstDash val="solid"/>
           </a:ln>
         </p:spPr>
+        <p:txBody>
+          <a:bodyPr/>
+          <a:p/>
+        </p:txBody>
       </p:sp>
       <p:sp>
         <p:nvSpPr>
@@ -21175,6 +22219,10 @@
             <a:prstDash val="solid"/>
           </a:ln>
         </p:spPr>
+        <p:txBody>
+          <a:bodyPr/>
+          <a:p/>
+        </p:txBody>
       </p:sp>
       <p:sp>
         <p:nvSpPr>
@@ -21200,6 +22248,10 @@
             <a:prstDash val="solid"/>
           </a:ln>
         </p:spPr>
+        <p:txBody>
+          <a:bodyPr/>
+          <a:p/>
+        </p:txBody>
       </p:sp>
       <p:sp>
         <p:nvSpPr>
@@ -21225,6 +22277,10 @@
             <a:prstDash val="solid"/>
           </a:ln>
         </p:spPr>
+        <p:txBody>
+          <a:bodyPr/>
+          <a:p/>
+        </p:txBody>
       </p:sp>
       <p:sp>
         <p:nvSpPr>
@@ -21250,6 +22306,10 @@
             <a:prstDash val="solid"/>
           </a:ln>
         </p:spPr>
+        <p:txBody>
+          <a:bodyPr/>
+          <a:p/>
+        </p:txBody>
       </p:sp>
       <p:sp>
         <p:nvSpPr>
@@ -21275,6 +22335,10 @@
             <a:prstDash val="solid"/>
           </a:ln>
         </p:spPr>
+        <p:txBody>
+          <a:bodyPr/>
+          <a:p/>
+        </p:txBody>
       </p:sp>
       <p:sp>
         <p:nvSpPr>
@@ -21300,6 +22364,10 @@
             <a:prstDash val="solid"/>
           </a:ln>
         </p:spPr>
+        <p:txBody>
+          <a:bodyPr/>
+          <a:p/>
+        </p:txBody>
       </p:sp>
       <p:sp>
         <p:nvSpPr>
@@ -21325,6 +22393,10 @@
             <a:prstDash val="solid"/>
           </a:ln>
         </p:spPr>
+        <p:txBody>
+          <a:bodyPr/>
+          <a:p/>
+        </p:txBody>
       </p:sp>
       <p:sp>
         <p:nvSpPr>
@@ -21350,6 +22422,10 @@
             <a:prstDash val="solid"/>
           </a:ln>
         </p:spPr>
+        <p:txBody>
+          <a:bodyPr/>
+          <a:p/>
+        </p:txBody>
       </p:sp>
       <p:sp>
         <p:nvSpPr>
@@ -21375,6 +22451,10 @@
             <a:prstDash val="solid"/>
           </a:ln>
         </p:spPr>
+        <p:txBody>
+          <a:bodyPr/>
+          <a:p/>
+        </p:txBody>
       </p:sp>
       <p:sp>
         <p:nvSpPr>
@@ -21400,6 +22480,10 @@
             <a:prstDash val="solid"/>
           </a:ln>
         </p:spPr>
+        <p:txBody>
+          <a:bodyPr/>
+          <a:p/>
+        </p:txBody>
       </p:sp>
       <p:sp>
         <p:nvSpPr>
@@ -21425,6 +22509,10 @@
             <a:prstDash val="solid"/>
           </a:ln>
         </p:spPr>
+        <p:txBody>
+          <a:bodyPr/>
+          <a:p/>
+        </p:txBody>
       </p:sp>
       <p:sp>
         <p:nvSpPr>
@@ -21450,6 +22538,10 @@
             <a:prstDash val="solid"/>
           </a:ln>
         </p:spPr>
+        <p:txBody>
+          <a:bodyPr/>
+          <a:p/>
+        </p:txBody>
       </p:sp>
       <p:sp>
         <p:nvSpPr>
@@ -21475,6 +22567,10 @@
             <a:prstDash val="solid"/>
           </a:ln>
         </p:spPr>
+        <p:txBody>
+          <a:bodyPr/>
+          <a:p/>
+        </p:txBody>
       </p:sp>
       <p:sp>
         <p:nvSpPr>
@@ -21500,6 +22596,10 @@
             <a:prstDash val="solid"/>
           </a:ln>
         </p:spPr>
+        <p:txBody>
+          <a:bodyPr/>
+          <a:p/>
+        </p:txBody>
       </p:sp>
       <p:sp>
         <p:nvSpPr>
@@ -21525,6 +22625,10 @@
             <a:prstDash val="solid"/>
           </a:ln>
         </p:spPr>
+        <p:txBody>
+          <a:bodyPr/>
+          <a:p/>
+        </p:txBody>
       </p:sp>
       <p:sp>
         <p:nvSpPr>
@@ -21550,6 +22654,10 @@
             <a:prstDash val="solid"/>
           </a:ln>
         </p:spPr>
+        <p:txBody>
+          <a:bodyPr/>
+          <a:p/>
+        </p:txBody>
       </p:sp>
       <p:sp>
         <p:nvSpPr>
@@ -21575,6 +22683,10 @@
             <a:prstDash val="solid"/>
           </a:ln>
         </p:spPr>
+        <p:txBody>
+          <a:bodyPr/>
+          <a:p/>
+        </p:txBody>
       </p:sp>
       <p:sp>
         <p:nvSpPr>
@@ -21600,6 +22712,10 @@
             <a:prstDash val="solid"/>
           </a:ln>
         </p:spPr>
+        <p:txBody>
+          <a:bodyPr/>
+          <a:p/>
+        </p:txBody>
       </p:sp>
       <p:sp>
         <p:nvSpPr>
@@ -21717,6 +22833,10 @@
             <a:prstDash val="solid"/>
           </a:ln>
         </p:spPr>
+        <p:txBody>
+          <a:bodyPr/>
+          <a:p/>
+        </p:txBody>
       </p:sp>
       <p:sp>
         <p:nvSpPr>
@@ -21742,6 +22862,10 @@
             <a:prstDash val="solid"/>
           </a:ln>
         </p:spPr>
+        <p:txBody>
+          <a:bodyPr/>
+          <a:p/>
+        </p:txBody>
       </p:sp>
       <p:sp>
         <p:nvSpPr>
@@ -21767,6 +22891,10 @@
             <a:prstDash val="solid"/>
           </a:ln>
         </p:spPr>
+        <p:txBody>
+          <a:bodyPr/>
+          <a:p/>
+        </p:txBody>
       </p:sp>
       <p:sp>
         <p:nvSpPr>
@@ -21792,6 +22920,10 @@
             <a:prstDash val="solid"/>
           </a:ln>
         </p:spPr>
+        <p:txBody>
+          <a:bodyPr/>
+          <a:p/>
+        </p:txBody>
       </p:sp>
       <p:sp>
         <p:nvSpPr>
@@ -21817,6 +22949,10 @@
             <a:prstDash val="solid"/>
           </a:ln>
         </p:spPr>
+        <p:txBody>
+          <a:bodyPr/>
+          <a:p/>
+        </p:txBody>
       </p:sp>
       <p:sp>
         <p:nvSpPr>
@@ -21842,6 +22978,10 @@
             <a:prstDash val="solid"/>
           </a:ln>
         </p:spPr>
+        <p:txBody>
+          <a:bodyPr/>
+          <a:p/>
+        </p:txBody>
       </p:sp>
       <p:sp>
         <p:nvSpPr>
@@ -21867,6 +23007,10 @@
             <a:prstDash val="solid"/>
           </a:ln>
         </p:spPr>
+        <p:txBody>
+          <a:bodyPr/>
+          <a:p/>
+        </p:txBody>
       </p:sp>
       <p:sp>
         <p:nvSpPr>
@@ -21892,6 +23036,10 @@
             <a:prstDash val="solid"/>
           </a:ln>
         </p:spPr>
+        <p:txBody>
+          <a:bodyPr/>
+          <a:p/>
+        </p:txBody>
       </p:sp>
       <p:sp>
         <p:nvSpPr>
@@ -21917,6 +23065,10 @@
             <a:prstDash val="solid"/>
           </a:ln>
         </p:spPr>
+        <p:txBody>
+          <a:bodyPr/>
+          <a:p/>
+        </p:txBody>
       </p:sp>
       <p:sp>
         <p:nvSpPr>
@@ -21942,6 +23094,10 @@
             <a:prstDash val="solid"/>
           </a:ln>
         </p:spPr>
+        <p:txBody>
+          <a:bodyPr/>
+          <a:p/>
+        </p:txBody>
       </p:sp>
       <p:sp>
         <p:nvSpPr>
@@ -21967,6 +23123,10 @@
             <a:prstDash val="solid"/>
           </a:ln>
         </p:spPr>
+        <p:txBody>
+          <a:bodyPr/>
+          <a:p/>
+        </p:txBody>
       </p:sp>
       <p:sp>
         <p:nvSpPr>
@@ -21992,6 +23152,10 @@
             <a:prstDash val="solid"/>
           </a:ln>
         </p:spPr>
+        <p:txBody>
+          <a:bodyPr/>
+          <a:p/>
+        </p:txBody>
       </p:sp>
       <p:sp>
         <p:nvSpPr>
@@ -22017,6 +23181,10 @@
             <a:prstDash val="solid"/>
           </a:ln>
         </p:spPr>
+        <p:txBody>
+          <a:bodyPr/>
+          <a:p/>
+        </p:txBody>
       </p:sp>
       <p:sp>
         <p:nvSpPr>
@@ -22042,6 +23210,10 @@
             <a:prstDash val="solid"/>
           </a:ln>
         </p:spPr>
+        <p:txBody>
+          <a:bodyPr/>
+          <a:p/>
+        </p:txBody>
       </p:sp>
       <p:sp>
         <p:nvSpPr>
@@ -22067,6 +23239,10 @@
             <a:prstDash val="solid"/>
           </a:ln>
         </p:spPr>
+        <p:txBody>
+          <a:bodyPr/>
+          <a:p/>
+        </p:txBody>
       </p:sp>
       <p:sp>
         <p:nvSpPr>
@@ -22092,6 +23268,10 @@
             <a:prstDash val="solid"/>
           </a:ln>
         </p:spPr>
+        <p:txBody>
+          <a:bodyPr/>
+          <a:p/>
+        </p:txBody>
       </p:sp>
       <p:sp>
         <p:nvSpPr>
@@ -22117,6 +23297,10 @@
             <a:prstDash val="solid"/>
           </a:ln>
         </p:spPr>
+        <p:txBody>
+          <a:bodyPr/>
+          <a:p/>
+        </p:txBody>
       </p:sp>
       <p:sp>
         <p:nvSpPr>
@@ -22142,6 +23326,10 @@
             <a:prstDash val="solid"/>
           </a:ln>
         </p:spPr>
+        <p:txBody>
+          <a:bodyPr/>
+          <a:p/>
+        </p:txBody>
       </p:sp>
       <p:sp>
         <p:nvSpPr>
@@ -22167,6 +23355,10 @@
             <a:prstDash val="solid"/>
           </a:ln>
         </p:spPr>
+        <p:txBody>
+          <a:bodyPr/>
+          <a:p/>
+        </p:txBody>
       </p:sp>
       <p:sp>
         <p:nvSpPr>
@@ -22192,6 +23384,10 @@
             <a:prstDash val="solid"/>
           </a:ln>
         </p:spPr>
+        <p:txBody>
+          <a:bodyPr/>
+          <a:p/>
+        </p:txBody>
       </p:sp>
       <p:sp>
         <p:nvSpPr>
@@ -22217,6 +23413,10 @@
             <a:prstDash val="solid"/>
           </a:ln>
         </p:spPr>
+        <p:txBody>
+          <a:bodyPr/>
+          <a:p/>
+        </p:txBody>
       </p:sp>
       <p:sp>
         <p:nvSpPr>
@@ -22242,6 +23442,10 @@
             <a:prstDash val="solid"/>
           </a:ln>
         </p:spPr>
+        <p:txBody>
+          <a:bodyPr/>
+          <a:p/>
+        </p:txBody>
       </p:sp>
       <p:sp>
         <p:nvSpPr>
@@ -22267,6 +23471,10 @@
             <a:prstDash val="solid"/>
           </a:ln>
         </p:spPr>
+        <p:txBody>
+          <a:bodyPr/>
+          <a:p/>
+        </p:txBody>
       </p:sp>
       <p:sp>
         <p:nvSpPr>
@@ -22292,6 +23500,10 @@
             <a:prstDash val="solid"/>
           </a:ln>
         </p:spPr>
+        <p:txBody>
+          <a:bodyPr/>
+          <a:p/>
+        </p:txBody>
       </p:sp>
       <p:sp>
         <p:nvSpPr>
@@ -22317,6 +23529,10 @@
             <a:prstDash val="solid"/>
           </a:ln>
         </p:spPr>
+        <p:txBody>
+          <a:bodyPr/>
+          <a:p/>
+        </p:txBody>
       </p:sp>
       <p:sp>
         <p:nvSpPr>
@@ -22342,6 +23558,10 @@
             <a:prstDash val="solid"/>
           </a:ln>
         </p:spPr>
+        <p:txBody>
+          <a:bodyPr/>
+          <a:p/>
+        </p:txBody>
       </p:sp>
       <p:sp>
         <p:nvSpPr>
@@ -22367,6 +23587,10 @@
             <a:prstDash val="solid"/>
           </a:ln>
         </p:spPr>
+        <p:txBody>
+          <a:bodyPr/>
+          <a:p/>
+        </p:txBody>
       </p:sp>
       <p:sp>
         <p:nvSpPr>
@@ -22392,6 +23616,10 @@
             <a:prstDash val="solid"/>
           </a:ln>
         </p:spPr>
+        <p:txBody>
+          <a:bodyPr/>
+          <a:p/>
+        </p:txBody>
       </p:sp>
       <p:sp>
         <p:nvSpPr>
@@ -22417,6 +23645,10 @@
             <a:prstDash val="solid"/>
           </a:ln>
         </p:spPr>
+        <p:txBody>
+          <a:bodyPr/>
+          <a:p/>
+        </p:txBody>
       </p:sp>
       <p:sp>
         <p:nvSpPr>
@@ -22442,6 +23674,10 @@
             <a:prstDash val="solid"/>
           </a:ln>
         </p:spPr>
+        <p:txBody>
+          <a:bodyPr/>
+          <a:p/>
+        </p:txBody>
       </p:sp>
       <p:sp>
         <p:nvSpPr>
@@ -22467,6 +23703,10 @@
             <a:prstDash val="solid"/>
           </a:ln>
         </p:spPr>
+        <p:txBody>
+          <a:bodyPr/>
+          <a:p/>
+        </p:txBody>
       </p:sp>
       <p:sp>
         <p:nvSpPr>
@@ -22492,6 +23732,10 @@
             <a:prstDash val="solid"/>
           </a:ln>
         </p:spPr>
+        <p:txBody>
+          <a:bodyPr/>
+          <a:p/>
+        </p:txBody>
       </p:sp>
       <p:sp>
         <p:nvSpPr>
@@ -22517,6 +23761,10 @@
             <a:prstDash val="solid"/>
           </a:ln>
         </p:spPr>
+        <p:txBody>
+          <a:bodyPr/>
+          <a:p/>
+        </p:txBody>
       </p:sp>
       <p:sp>
         <p:nvSpPr>
@@ -22542,6 +23790,10 @@
             <a:prstDash val="solid"/>
           </a:ln>
         </p:spPr>
+        <p:txBody>
+          <a:bodyPr/>
+          <a:p/>
+        </p:txBody>
       </p:sp>
       <p:sp>
         <p:nvSpPr>
@@ -22567,6 +23819,10 @@
             <a:prstDash val="solid"/>
           </a:ln>
         </p:spPr>
+        <p:txBody>
+          <a:bodyPr/>
+          <a:p/>
+        </p:txBody>
       </p:sp>
       <p:sp>
         <p:nvSpPr>
@@ -22592,6 +23848,10 @@
             <a:prstDash val="solid"/>
           </a:ln>
         </p:spPr>
+        <p:txBody>
+          <a:bodyPr/>
+          <a:p/>
+        </p:txBody>
       </p:sp>
       <p:sp>
         <p:nvSpPr>
@@ -22617,6 +23877,10 @@
             <a:prstDash val="solid"/>
           </a:ln>
         </p:spPr>
+        <p:txBody>
+          <a:bodyPr/>
+          <a:p/>
+        </p:txBody>
       </p:sp>
       <p:sp>
         <p:nvSpPr>
@@ -22642,6 +23906,10 @@
             <a:prstDash val="solid"/>
           </a:ln>
         </p:spPr>
+        <p:txBody>
+          <a:bodyPr/>
+          <a:p/>
+        </p:txBody>
       </p:sp>
       <p:sp>
         <p:nvSpPr>
@@ -22667,6 +23935,10 @@
             <a:prstDash val="solid"/>
           </a:ln>
         </p:spPr>
+        <p:txBody>
+          <a:bodyPr/>
+          <a:p/>
+        </p:txBody>
       </p:sp>
       <p:sp>
         <p:nvSpPr>
@@ -22692,6 +23964,10 @@
             <a:prstDash val="solid"/>
           </a:ln>
         </p:spPr>
+        <p:txBody>
+          <a:bodyPr/>
+          <a:p/>
+        </p:txBody>
       </p:sp>
       <p:sp>
         <p:nvSpPr>
@@ -22717,6 +23993,10 @@
             <a:prstDash val="solid"/>
           </a:ln>
         </p:spPr>
+        <p:txBody>
+          <a:bodyPr/>
+          <a:p/>
+        </p:txBody>
       </p:sp>
       <p:sp>
         <p:nvSpPr>
@@ -22742,6 +24022,10 @@
             <a:prstDash val="solid"/>
           </a:ln>
         </p:spPr>
+        <p:txBody>
+          <a:bodyPr/>
+          <a:p/>
+        </p:txBody>
       </p:sp>
       <p:sp>
         <p:nvSpPr>
@@ -22767,6 +24051,10 @@
             <a:prstDash val="solid"/>
           </a:ln>
         </p:spPr>
+        <p:txBody>
+          <a:bodyPr/>
+          <a:p/>
+        </p:txBody>
       </p:sp>
       <p:sp>
         <p:nvSpPr>
@@ -22792,6 +24080,10 @@
             <a:prstDash val="solid"/>
           </a:ln>
         </p:spPr>
+        <p:txBody>
+          <a:bodyPr/>
+          <a:p/>
+        </p:txBody>
       </p:sp>
       <p:sp>
         <p:nvSpPr>
@@ -22817,6 +24109,10 @@
             <a:prstDash val="solid"/>
           </a:ln>
         </p:spPr>
+        <p:txBody>
+          <a:bodyPr/>
+          <a:p/>
+        </p:txBody>
       </p:sp>
       <p:sp>
         <p:nvSpPr>
@@ -22842,6 +24138,10 @@
             <a:prstDash val="solid"/>
           </a:ln>
         </p:spPr>
+        <p:txBody>
+          <a:bodyPr/>
+          <a:p/>
+        </p:txBody>
       </p:sp>
       <p:sp>
         <p:nvSpPr>
@@ -22867,6 +24167,10 @@
             <a:prstDash val="solid"/>
           </a:ln>
         </p:spPr>
+        <p:txBody>
+          <a:bodyPr/>
+          <a:p/>
+        </p:txBody>
       </p:sp>
       <p:sp>
         <p:nvSpPr>
@@ -22892,6 +24196,10 @@
             <a:prstDash val="solid"/>
           </a:ln>
         </p:spPr>
+        <p:txBody>
+          <a:bodyPr/>
+          <a:p/>
+        </p:txBody>
       </p:sp>
       <p:sp>
         <p:nvSpPr>
@@ -22917,6 +24225,10 @@
             <a:prstDash val="solid"/>
           </a:ln>
         </p:spPr>
+        <p:txBody>
+          <a:bodyPr/>
+          <a:p/>
+        </p:txBody>
       </p:sp>
       <p:sp>
         <p:nvSpPr>
@@ -22942,6 +24254,10 @@
             <a:prstDash val="solid"/>
           </a:ln>
         </p:spPr>
+        <p:txBody>
+          <a:bodyPr/>
+          <a:p/>
+        </p:txBody>
       </p:sp>
       <p:sp>
         <p:nvSpPr>
@@ -22967,6 +24283,10 @@
             <a:prstDash val="solid"/>
           </a:ln>
         </p:spPr>
+        <p:txBody>
+          <a:bodyPr/>
+          <a:p/>
+        </p:txBody>
       </p:sp>
       <p:sp>
         <p:nvSpPr>
@@ -22992,6 +24312,10 @@
             <a:prstDash val="solid"/>
           </a:ln>
         </p:spPr>
+        <p:txBody>
+          <a:bodyPr/>
+          <a:p/>
+        </p:txBody>
       </p:sp>
       <p:sp>
         <p:nvSpPr>
@@ -23017,6 +24341,10 @@
             <a:prstDash val="solid"/>
           </a:ln>
         </p:spPr>
+        <p:txBody>
+          <a:bodyPr/>
+          <a:p/>
+        </p:txBody>
       </p:sp>
       <p:sp>
         <p:nvSpPr>
@@ -23042,6 +24370,10 @@
             <a:prstDash val="solid"/>
           </a:ln>
         </p:spPr>
+        <p:txBody>
+          <a:bodyPr/>
+          <a:p/>
+        </p:txBody>
       </p:sp>
       <p:sp>
         <p:nvSpPr>
@@ -23067,6 +24399,10 @@
             <a:prstDash val="solid"/>
           </a:ln>
         </p:spPr>
+        <p:txBody>
+          <a:bodyPr/>
+          <a:p/>
+        </p:txBody>
       </p:sp>
       <p:sp>
         <p:nvSpPr>
@@ -23092,6 +24428,10 @@
             <a:prstDash val="solid"/>
           </a:ln>
         </p:spPr>
+        <p:txBody>
+          <a:bodyPr/>
+          <a:p/>
+        </p:txBody>
       </p:sp>
       <p:sp>
         <p:nvSpPr>
@@ -23117,6 +24457,10 @@
             <a:prstDash val="solid"/>
           </a:ln>
         </p:spPr>
+        <p:txBody>
+          <a:bodyPr/>
+          <a:p/>
+        </p:txBody>
       </p:sp>
       <p:sp>
         <p:nvSpPr>
@@ -23142,6 +24486,10 @@
             <a:prstDash val="solid"/>
           </a:ln>
         </p:spPr>
+        <p:txBody>
+          <a:bodyPr/>
+          <a:p/>
+        </p:txBody>
       </p:sp>
       <p:sp>
         <p:nvSpPr>
@@ -23167,6 +24515,10 @@
             <a:prstDash val="solid"/>
           </a:ln>
         </p:spPr>
+        <p:txBody>
+          <a:bodyPr/>
+          <a:p/>
+        </p:txBody>
       </p:sp>
       <p:sp>
         <p:nvSpPr>
@@ -23192,6 +24544,10 @@
             <a:prstDash val="solid"/>
           </a:ln>
         </p:spPr>
+        <p:txBody>
+          <a:bodyPr/>
+          <a:p/>
+        </p:txBody>
       </p:sp>
       <p:sp>
         <p:nvSpPr>
@@ -23217,6 +24573,10 @@
             <a:prstDash val="solid"/>
           </a:ln>
         </p:spPr>
+        <p:txBody>
+          <a:bodyPr/>
+          <a:p/>
+        </p:txBody>
       </p:sp>
       <p:sp>
         <p:nvSpPr>
@@ -23242,6 +24602,10 @@
             <a:prstDash val="solid"/>
           </a:ln>
         </p:spPr>
+        <p:txBody>
+          <a:bodyPr/>
+          <a:p/>
+        </p:txBody>
       </p:sp>
       <p:sp>
         <p:nvSpPr>
@@ -23267,6 +24631,10 @@
             <a:prstDash val="solid"/>
           </a:ln>
         </p:spPr>
+        <p:txBody>
+          <a:bodyPr/>
+          <a:p/>
+        </p:txBody>
       </p:sp>
       <p:sp>
         <p:nvSpPr>
@@ -23292,6 +24660,10 @@
             <a:prstDash val="solid"/>
           </a:ln>
         </p:spPr>
+        <p:txBody>
+          <a:bodyPr/>
+          <a:p/>
+        </p:txBody>
       </p:sp>
       <p:sp>
         <p:nvSpPr>
@@ -23317,6 +24689,10 @@
             <a:prstDash val="solid"/>
           </a:ln>
         </p:spPr>
+        <p:txBody>
+          <a:bodyPr/>
+          <a:p/>
+        </p:txBody>
       </p:sp>
       <p:sp>
         <p:nvSpPr>
@@ -23342,6 +24718,10 @@
             <a:prstDash val="solid"/>
           </a:ln>
         </p:spPr>
+        <p:txBody>
+          <a:bodyPr/>
+          <a:p/>
+        </p:txBody>
       </p:sp>
       <p:sp>
         <p:nvSpPr>
@@ -23367,6 +24747,10 @@
             <a:prstDash val="solid"/>
           </a:ln>
         </p:spPr>
+        <p:txBody>
+          <a:bodyPr/>
+          <a:p/>
+        </p:txBody>
       </p:sp>
       <p:sp>
         <p:nvSpPr>
@@ -23392,6 +24776,10 @@
             <a:prstDash val="solid"/>
           </a:ln>
         </p:spPr>
+        <p:txBody>
+          <a:bodyPr/>
+          <a:p/>
+        </p:txBody>
       </p:sp>
       <p:sp>
         <p:nvSpPr>
@@ -23417,6 +24805,10 @@
             <a:prstDash val="solid"/>
           </a:ln>
         </p:spPr>
+        <p:txBody>
+          <a:bodyPr/>
+          <a:p/>
+        </p:txBody>
       </p:sp>
       <p:sp>
         <p:nvSpPr>
@@ -23442,6 +24834,10 @@
             <a:prstDash val="solid"/>
           </a:ln>
         </p:spPr>
+        <p:txBody>
+          <a:bodyPr/>
+          <a:p/>
+        </p:txBody>
       </p:sp>
       <p:sp>
         <p:nvSpPr>
@@ -23467,6 +24863,10 @@
             <a:prstDash val="solid"/>
           </a:ln>
         </p:spPr>
+        <p:txBody>
+          <a:bodyPr/>
+          <a:p/>
+        </p:txBody>
       </p:sp>
       <p:sp>
         <p:nvSpPr>
@@ -23492,6 +24892,10 @@
             <a:prstDash val="solid"/>
           </a:ln>
         </p:spPr>
+        <p:txBody>
+          <a:bodyPr/>
+          <a:p/>
+        </p:txBody>
       </p:sp>
       <p:sp>
         <p:nvSpPr>
@@ -23517,6 +24921,10 @@
             <a:prstDash val="solid"/>
           </a:ln>
         </p:spPr>
+        <p:txBody>
+          <a:bodyPr/>
+          <a:p/>
+        </p:txBody>
       </p:sp>
       <p:sp>
         <p:nvSpPr>
@@ -23542,6 +24950,10 @@
             <a:prstDash val="solid"/>
           </a:ln>
         </p:spPr>
+        <p:txBody>
+          <a:bodyPr/>
+          <a:p/>
+        </p:txBody>
       </p:sp>
       <p:sp>
         <p:nvSpPr>
@@ -23567,6 +24979,10 @@
             <a:prstDash val="solid"/>
           </a:ln>
         </p:spPr>
+        <p:txBody>
+          <a:bodyPr/>
+          <a:p/>
+        </p:txBody>
       </p:sp>
       <p:sp>
         <p:nvSpPr>
@@ -23592,6 +25008,10 @@
             <a:prstDash val="solid"/>
           </a:ln>
         </p:spPr>
+        <p:txBody>
+          <a:bodyPr/>
+          <a:p/>
+        </p:txBody>
       </p:sp>
       <p:sp>
         <p:nvSpPr>
@@ -23617,6 +25037,10 @@
             <a:prstDash val="solid"/>
           </a:ln>
         </p:spPr>
+        <p:txBody>
+          <a:bodyPr/>
+          <a:p/>
+        </p:txBody>
       </p:sp>
       <p:sp>
         <p:nvSpPr>
@@ -23642,6 +25066,10 @@
             <a:prstDash val="solid"/>
           </a:ln>
         </p:spPr>
+        <p:txBody>
+          <a:bodyPr/>
+          <a:p/>
+        </p:txBody>
       </p:sp>
       <p:sp>
         <p:nvSpPr>
@@ -23667,6 +25095,10 @@
             <a:prstDash val="solid"/>
           </a:ln>
         </p:spPr>
+        <p:txBody>
+          <a:bodyPr/>
+          <a:p/>
+        </p:txBody>
       </p:sp>
       <p:sp>
         <p:nvSpPr>
@@ -23692,6 +25124,10 @@
             <a:prstDash val="solid"/>
           </a:ln>
         </p:spPr>
+        <p:txBody>
+          <a:bodyPr/>
+          <a:p/>
+        </p:txBody>
       </p:sp>
       <p:sp>
         <p:nvSpPr>
@@ -23717,6 +25153,10 @@
             <a:prstDash val="solid"/>
           </a:ln>
         </p:spPr>
+        <p:txBody>
+          <a:bodyPr/>
+          <a:p/>
+        </p:txBody>
       </p:sp>
       <p:sp>
         <p:nvSpPr>
@@ -23742,6 +25182,10 @@
             <a:prstDash val="solid"/>
           </a:ln>
         </p:spPr>
+        <p:txBody>
+          <a:bodyPr/>
+          <a:p/>
+        </p:txBody>
       </p:sp>
       <p:sp>
         <p:nvSpPr>
@@ -23767,6 +25211,10 @@
             <a:prstDash val="solid"/>
           </a:ln>
         </p:spPr>
+        <p:txBody>
+          <a:bodyPr/>
+          <a:p/>
+        </p:txBody>
       </p:sp>
       <p:sp>
         <p:nvSpPr>
@@ -23792,6 +25240,10 @@
             <a:prstDash val="solid"/>
           </a:ln>
         </p:spPr>
+        <p:txBody>
+          <a:bodyPr/>
+          <a:p/>
+        </p:txBody>
       </p:sp>
       <p:sp>
         <p:nvSpPr>
@@ -23817,6 +25269,10 @@
             <a:prstDash val="solid"/>
           </a:ln>
         </p:spPr>
+        <p:txBody>
+          <a:bodyPr/>
+          <a:p/>
+        </p:txBody>
       </p:sp>
       <p:sp>
         <p:nvSpPr>
@@ -23842,6 +25298,10 @@
             <a:prstDash val="solid"/>
           </a:ln>
         </p:spPr>
+        <p:txBody>
+          <a:bodyPr/>
+          <a:p/>
+        </p:txBody>
       </p:sp>
       <p:sp>
         <p:nvSpPr>
@@ -23867,6 +25327,10 @@
             <a:prstDash val="solid"/>
           </a:ln>
         </p:spPr>
+        <p:txBody>
+          <a:bodyPr/>
+          <a:p/>
+        </p:txBody>
       </p:sp>
       <p:sp>
         <p:nvSpPr>
@@ -23892,6 +25356,10 @@
             <a:prstDash val="solid"/>
           </a:ln>
         </p:spPr>
+        <p:txBody>
+          <a:bodyPr/>
+          <a:p/>
+        </p:txBody>
       </p:sp>
       <p:sp>
         <p:nvSpPr>
@@ -23917,6 +25385,10 @@
             <a:prstDash val="solid"/>
           </a:ln>
         </p:spPr>
+        <p:txBody>
+          <a:bodyPr/>
+          <a:p/>
+        </p:txBody>
       </p:sp>
       <p:sp>
         <p:nvSpPr>
@@ -23942,6 +25414,10 @@
             <a:prstDash val="solid"/>
           </a:ln>
         </p:spPr>
+        <p:txBody>
+          <a:bodyPr/>
+          <a:p/>
+        </p:txBody>
       </p:sp>
       <p:sp>
         <p:nvSpPr>
@@ -23967,6 +25443,10 @@
             <a:prstDash val="solid"/>
           </a:ln>
         </p:spPr>
+        <p:txBody>
+          <a:bodyPr/>
+          <a:p/>
+        </p:txBody>
       </p:sp>
       <p:sp>
         <p:nvSpPr>
@@ -23992,6 +25472,10 @@
             <a:prstDash val="solid"/>
           </a:ln>
         </p:spPr>
+        <p:txBody>
+          <a:bodyPr/>
+          <a:p/>
+        </p:txBody>
       </p:sp>
       <p:sp>
         <p:nvSpPr>
@@ -24017,6 +25501,10 @@
             <a:prstDash val="solid"/>
           </a:ln>
         </p:spPr>
+        <p:txBody>
+          <a:bodyPr/>
+          <a:p/>
+        </p:txBody>
       </p:sp>
       <p:sp>
         <p:nvSpPr>
@@ -24042,6 +25530,10 @@
             <a:prstDash val="solid"/>
           </a:ln>
         </p:spPr>
+        <p:txBody>
+          <a:bodyPr/>
+          <a:p/>
+        </p:txBody>
       </p:sp>
       <p:sp>
         <p:nvSpPr>
@@ -24067,6 +25559,10 @@
             <a:prstDash val="solid"/>
           </a:ln>
         </p:spPr>
+        <p:txBody>
+          <a:bodyPr/>
+          <a:p/>
+        </p:txBody>
       </p:sp>
       <p:sp>
         <p:nvSpPr>
@@ -24092,6 +25588,10 @@
             <a:prstDash val="solid"/>
           </a:ln>
         </p:spPr>
+        <p:txBody>
+          <a:bodyPr/>
+          <a:p/>
+        </p:txBody>
       </p:sp>
       <p:sp>
         <p:nvSpPr>
@@ -24117,6 +25617,10 @@
             <a:prstDash val="solid"/>
           </a:ln>
         </p:spPr>
+        <p:txBody>
+          <a:bodyPr/>
+          <a:p/>
+        </p:txBody>
       </p:sp>
       <p:sp>
         <p:nvSpPr>
@@ -24142,6 +25646,10 @@
             <a:prstDash val="solid"/>
           </a:ln>
         </p:spPr>
+        <p:txBody>
+          <a:bodyPr/>
+          <a:p/>
+        </p:txBody>
       </p:sp>
       <p:sp>
         <p:nvSpPr>
@@ -24167,6 +25675,10 @@
             <a:prstDash val="solid"/>
           </a:ln>
         </p:spPr>
+        <p:txBody>
+          <a:bodyPr/>
+          <a:p/>
+        </p:txBody>
       </p:sp>
       <p:sp>
         <p:nvSpPr>
@@ -24192,6 +25704,10 @@
             <a:prstDash val="solid"/>
           </a:ln>
         </p:spPr>
+        <p:txBody>
+          <a:bodyPr/>
+          <a:p/>
+        </p:txBody>
       </p:sp>
       <p:sp>
         <p:nvSpPr>
@@ -24217,6 +25733,10 @@
             <a:prstDash val="solid"/>
           </a:ln>
         </p:spPr>
+        <p:txBody>
+          <a:bodyPr/>
+          <a:p/>
+        </p:txBody>
       </p:sp>
       <p:sp>
         <p:nvSpPr>
@@ -24242,6 +25762,10 @@
             <a:prstDash val="solid"/>
           </a:ln>
         </p:spPr>
+        <p:txBody>
+          <a:bodyPr/>
+          <a:p/>
+        </p:txBody>
       </p:sp>
       <p:sp>
         <p:nvSpPr>
@@ -24267,6 +25791,10 @@
             <a:prstDash val="solid"/>
           </a:ln>
         </p:spPr>
+        <p:txBody>
+          <a:bodyPr/>
+          <a:p/>
+        </p:txBody>
       </p:sp>
       <p:sp>
         <p:nvSpPr>
@@ -24292,6 +25820,10 @@
             <a:prstDash val="solid"/>
           </a:ln>
         </p:spPr>
+        <p:txBody>
+          <a:bodyPr/>
+          <a:p/>
+        </p:txBody>
       </p:sp>
       <p:sp>
         <p:nvSpPr>
@@ -24317,6 +25849,10 @@
             <a:prstDash val="solid"/>
           </a:ln>
         </p:spPr>
+        <p:txBody>
+          <a:bodyPr/>
+          <a:p/>
+        </p:txBody>
       </p:sp>
       <p:sp>
         <p:nvSpPr>
@@ -24342,6 +25878,10 @@
             <a:prstDash val="solid"/>
           </a:ln>
         </p:spPr>
+        <p:txBody>
+          <a:bodyPr/>
+          <a:p/>
+        </p:txBody>
       </p:sp>
       <p:sp>
         <p:nvSpPr>
@@ -24367,6 +25907,10 @@
             <a:prstDash val="solid"/>
           </a:ln>
         </p:spPr>
+        <p:txBody>
+          <a:bodyPr/>
+          <a:p/>
+        </p:txBody>
       </p:sp>
       <p:sp>
         <p:nvSpPr>
@@ -24392,6 +25936,10 @@
             <a:prstDash val="solid"/>
           </a:ln>
         </p:spPr>
+        <p:txBody>
+          <a:bodyPr/>
+          <a:p/>
+        </p:txBody>
       </p:sp>
       <p:sp>
         <p:nvSpPr>
@@ -24417,6 +25965,10 @@
             <a:prstDash val="solid"/>
           </a:ln>
         </p:spPr>
+        <p:txBody>
+          <a:bodyPr/>
+          <a:p/>
+        </p:txBody>
       </p:sp>
       <p:sp>
         <p:nvSpPr>
@@ -24442,6 +25994,10 @@
             <a:prstDash val="solid"/>
           </a:ln>
         </p:spPr>
+        <p:txBody>
+          <a:bodyPr/>
+          <a:p/>
+        </p:txBody>
       </p:sp>
       <p:sp>
         <p:nvSpPr>
@@ -24467,6 +26023,10 @@
             <a:prstDash val="solid"/>
           </a:ln>
         </p:spPr>
+        <p:txBody>
+          <a:bodyPr/>
+          <a:p/>
+        </p:txBody>
       </p:sp>
       <p:sp>
         <p:nvSpPr>
@@ -24584,6 +26144,10 @@
             <a:prstDash val="solid"/>
           </a:ln>
         </p:spPr>
+        <p:txBody>
+          <a:bodyPr/>
+          <a:p/>
+        </p:txBody>
       </p:sp>
       <p:sp>
         <p:nvSpPr>
@@ -24724,6 +26288,10 @@
             <a:prstDash val="solid"/>
           </a:ln>
         </p:spPr>
+        <p:txBody>
+          <a:bodyPr/>
+          <a:p/>
+        </p:txBody>
       </p:sp>
       <p:sp>
         <p:nvSpPr>
@@ -24751,6 +26319,10 @@
             <a:prstDash val="solid"/>
           </a:ln>
         </p:spPr>
+        <p:txBody>
+          <a:bodyPr/>
+          <a:p/>
+        </p:txBody>
       </p:sp>
       <p:sp>
         <p:nvSpPr>
@@ -24778,6 +26350,10 @@
             <a:prstDash val="solid"/>
           </a:ln>
         </p:spPr>
+        <p:txBody>
+          <a:bodyPr/>
+          <a:p/>
+        </p:txBody>
       </p:sp>
       <p:pic>
         <p:nvPicPr>
@@ -25122,6 +26698,10 @@
             <a:prstDash val="solid"/>
           </a:ln>
         </p:spPr>
+        <p:txBody>
+          <a:bodyPr/>
+          <a:p/>
+        </p:txBody>
       </p:sp>
       <p:sp>
         <p:nvSpPr>
@@ -25161,7 +26741,7 @@
                 <a:ea typeface="Inter" pitchFamily="34" charset="-122"/>
                 <a:cs typeface="Inter" pitchFamily="34" charset="-120"/>
               </a:rPr>
-              <a:t>© 2026 Julian Krauß  ·  JK-CD-DE-2026-003  ·  Bernd-Blindow-Schulen Ravensburg</a:t>
+              <a:t>© 2026 Julian Krauß  ·  JK AXIS | GOLD MASTER  ·  Bernd-Blindow-Schulen Ravensburg</a:t>
             </a:r>
             <a:endParaRPr lang="en-US" sz="760" dirty="0"/>
           </a:p>
@@ -25239,6 +26819,10 @@
             <a:prstDash val="solid"/>
           </a:ln>
         </p:spPr>
+        <p:txBody>
+          <a:bodyPr/>
+          <a:p/>
+        </p:txBody>
       </p:sp>
       <p:sp>
         <p:nvSpPr>
@@ -25312,6 +26896,10 @@
             <a:prstDash val="solid"/>
           </a:ln>
         </p:spPr>
+        <p:txBody>
+          <a:bodyPr/>
+          <a:p/>
+        </p:txBody>
       </p:sp>
       <p:sp>
         <p:nvSpPr>
@@ -25385,6 +26973,10 @@
             <a:prstDash val="solid"/>
           </a:ln>
         </p:spPr>
+        <p:txBody>
+          <a:bodyPr/>
+          <a:p/>
+        </p:txBody>
       </p:sp>
       <p:sp>
         <p:nvSpPr>
@@ -25458,6 +27050,10 @@
             <a:prstDash val="solid"/>
           </a:ln>
         </p:spPr>
+        <p:txBody>
+          <a:bodyPr/>
+          <a:p/>
+        </p:txBody>
       </p:sp>
       <p:sp>
         <p:nvSpPr>
@@ -25531,6 +27127,10 @@
             <a:prstDash val="solid"/>
           </a:ln>
         </p:spPr>
+        <p:txBody>
+          <a:bodyPr/>
+          <a:p/>
+        </p:txBody>
       </p:sp>
       <p:sp>
         <p:nvSpPr>
@@ -25602,6 +27202,10 @@
             <a:prstDash val="solid"/>
           </a:ln>
         </p:spPr>
+        <p:txBody>
+          <a:bodyPr/>
+          <a:p/>
+        </p:txBody>
       </p:sp>
       <p:sp>
         <p:nvSpPr>
@@ -25629,6 +27233,10 @@
             <a:prstDash val="solid"/>
           </a:ln>
         </p:spPr>
+        <p:txBody>
+          <a:bodyPr/>
+          <a:p/>
+        </p:txBody>
       </p:sp>
       <p:sp>
         <p:nvSpPr>
@@ -25832,6 +27440,10 @@
             <a:prstDash val="solid"/>
           </a:ln>
         </p:spPr>
+        <p:txBody>
+          <a:bodyPr/>
+          <a:p/>
+        </p:txBody>
       </p:sp>
       <p:sp>
         <p:nvSpPr>
@@ -25859,6 +27471,10 @@
             <a:prstDash val="solid"/>
           </a:ln>
         </p:spPr>
+        <p:txBody>
+          <a:bodyPr/>
+          <a:p/>
+        </p:txBody>
       </p:sp>
       <p:sp>
         <p:nvSpPr>
@@ -26062,6 +27678,10 @@
             <a:prstDash val="solid"/>
           </a:ln>
         </p:spPr>
+        <p:txBody>
+          <a:bodyPr/>
+          <a:p/>
+        </p:txBody>
       </p:sp>
       <p:sp>
         <p:nvSpPr>
@@ -26089,6 +27709,10 @@
             <a:prstDash val="solid"/>
           </a:ln>
         </p:spPr>
+        <p:txBody>
+          <a:bodyPr/>
+          <a:p/>
+        </p:txBody>
       </p:sp>
       <p:sp>
         <p:nvSpPr>
@@ -26292,6 +27916,10 @@
             <a:prstDash val="solid"/>
           </a:ln>
         </p:spPr>
+        <p:txBody>
+          <a:bodyPr/>
+          <a:p/>
+        </p:txBody>
       </p:sp>
       <p:sp>
         <p:nvSpPr>
@@ -26319,6 +27947,10 @@
             <a:prstDash val="solid"/>
           </a:ln>
         </p:spPr>
+        <p:txBody>
+          <a:bodyPr/>
+          <a:p/>
+        </p:txBody>
       </p:sp>
       <p:sp>
         <p:nvSpPr>
@@ -26480,6 +28112,10 @@
             <a:prstDash val="solid"/>
           </a:ln>
         </p:spPr>
+        <p:txBody>
+          <a:bodyPr/>
+          <a:p/>
+        </p:txBody>
       </p:sp>
       <p:sp>
         <p:nvSpPr>
@@ -26507,6 +28143,10 @@
             <a:prstDash val="solid"/>
           </a:ln>
         </p:spPr>
+        <p:txBody>
+          <a:bodyPr/>
+          <a:p/>
+        </p:txBody>
       </p:sp>
       <p:sp>
         <p:nvSpPr>
@@ -26647,6 +28287,10 @@
             <a:prstDash val="solid"/>
           </a:ln>
         </p:spPr>
+        <p:txBody>
+          <a:bodyPr/>
+          <a:p/>
+        </p:txBody>
       </p:sp>
       <p:sp>
         <p:nvSpPr>
@@ -26674,6 +28318,10 @@
             <a:prstDash val="solid"/>
           </a:ln>
         </p:spPr>
+        <p:txBody>
+          <a:bodyPr/>
+          <a:p/>
+        </p:txBody>
       </p:sp>
       <p:sp>
         <p:nvSpPr>
@@ -26701,6 +28349,10 @@
             <a:prstDash val="solid"/>
           </a:ln>
         </p:spPr>
+        <p:txBody>
+          <a:bodyPr/>
+          <a:p/>
+        </p:txBody>
       </p:sp>
       <p:pic>
         <p:nvPicPr>
@@ -27045,6 +28697,10 @@
             <a:prstDash val="solid"/>
           </a:ln>
         </p:spPr>
+        <p:txBody>
+          <a:bodyPr/>
+          <a:p/>
+        </p:txBody>
       </p:sp>
       <p:sp>
         <p:nvSpPr>
@@ -27084,7 +28740,7 @@
                 <a:ea typeface="Inter" pitchFamily="34" charset="-122"/>
                 <a:cs typeface="Inter" pitchFamily="34" charset="-120"/>
               </a:rPr>
-              <a:t>© 2026 Julian Krauß  ·  JK-CD-DE-2026-003  ·  Bernd-Blindow-Schulen Ravensburg</a:t>
+              <a:t>© 2026 Julian Krauß  ·  JK AXIS | GOLD MASTER  ·  Bernd-Blindow-Schulen Ravensburg</a:t>
             </a:r>
             <a:endParaRPr lang="en-US" sz="760" dirty="0"/>
           </a:p>
@@ -27162,6 +28818,10 @@
             <a:prstDash val="solid"/>
           </a:ln>
         </p:spPr>
+        <p:txBody>
+          <a:bodyPr/>
+          <a:p/>
+        </p:txBody>
       </p:sp>
       <p:sp>
         <p:nvSpPr>
@@ -27235,6 +28895,10 @@
             <a:prstDash val="solid"/>
           </a:ln>
         </p:spPr>
+        <p:txBody>
+          <a:bodyPr/>
+          <a:p/>
+        </p:txBody>
       </p:sp>
       <p:sp>
         <p:nvSpPr>
@@ -27308,6 +28972,10 @@
             <a:prstDash val="solid"/>
           </a:ln>
         </p:spPr>
+        <p:txBody>
+          <a:bodyPr/>
+          <a:p/>
+        </p:txBody>
       </p:sp>
       <p:sp>
         <p:nvSpPr>
@@ -27381,6 +29049,10 @@
             <a:prstDash val="solid"/>
           </a:ln>
         </p:spPr>
+        <p:txBody>
+          <a:bodyPr/>
+          <a:p/>
+        </p:txBody>
       </p:sp>
       <p:sp>
         <p:nvSpPr>
@@ -27454,6 +29126,10 @@
             <a:prstDash val="solid"/>
           </a:ln>
         </p:spPr>
+        <p:txBody>
+          <a:bodyPr/>
+          <a:p/>
+        </p:txBody>
       </p:sp>
       <p:sp>
         <p:nvSpPr>
@@ -27525,6 +29201,10 @@
             <a:prstDash val="solid"/>
           </a:ln>
         </p:spPr>
+        <p:txBody>
+          <a:bodyPr/>
+          <a:p/>
+        </p:txBody>
       </p:sp>
       <p:sp>
         <p:nvSpPr>
@@ -27552,6 +29232,10 @@
             <a:prstDash val="solid"/>
           </a:ln>
         </p:spPr>
+        <p:txBody>
+          <a:bodyPr/>
+          <a:p/>
+        </p:txBody>
       </p:sp>
       <p:sp>
         <p:nvSpPr>
@@ -27687,6 +29371,10 @@
             <a:prstDash val="solid"/>
           </a:ln>
         </p:spPr>
+        <p:txBody>
+          <a:bodyPr/>
+          <a:p/>
+        </p:txBody>
       </p:sp>
       <p:sp>
         <p:nvSpPr>
@@ -27714,6 +29402,10 @@
             <a:prstDash val="solid"/>
           </a:ln>
         </p:spPr>
+        <p:txBody>
+          <a:bodyPr/>
+          <a:p/>
+        </p:txBody>
       </p:sp>
       <p:sp>
         <p:nvSpPr>
@@ -27829,6 +29521,10 @@
             <a:prstDash val="solid"/>
           </a:ln>
         </p:spPr>
+        <p:txBody>
+          <a:bodyPr/>
+          <a:p/>
+        </p:txBody>
       </p:sp>
       <p:sp>
         <p:nvSpPr>
@@ -27856,6 +29552,10 @@
             <a:prstDash val="solid"/>
           </a:ln>
         </p:spPr>
+        <p:txBody>
+          <a:bodyPr/>
+          <a:p/>
+        </p:txBody>
       </p:sp>
       <p:sp>
         <p:nvSpPr>
@@ -27971,6 +29671,10 @@
             <a:prstDash val="solid"/>
           </a:ln>
         </p:spPr>
+        <p:txBody>
+          <a:bodyPr/>
+          <a:p/>
+        </p:txBody>
       </p:sp>
       <p:sp>
         <p:nvSpPr>
@@ -27998,6 +29702,10 @@
             <a:prstDash val="solid"/>
           </a:ln>
         </p:spPr>
+        <p:txBody>
+          <a:bodyPr/>
+          <a:p/>
+        </p:txBody>
       </p:sp>
       <p:sp>
         <p:nvSpPr>
@@ -28109,6 +29817,10 @@
             <a:prstDash val="solid"/>
           </a:ln>
         </p:spPr>
+        <p:txBody>
+          <a:bodyPr/>
+          <a:p/>
+        </p:txBody>
       </p:sp>
       <p:sp>
         <p:nvSpPr>
@@ -28205,6 +29917,10 @@
             <a:prstDash val="solid"/>
           </a:ln>
         </p:spPr>
+        <p:txBody>
+          <a:bodyPr/>
+          <a:p/>
+        </p:txBody>
       </p:sp>
       <p:sp>
         <p:nvSpPr>
@@ -28232,6 +29948,10 @@
             <a:prstDash val="solid"/>
           </a:ln>
         </p:spPr>
+        <p:txBody>
+          <a:bodyPr/>
+          <a:p/>
+        </p:txBody>
       </p:sp>
       <p:sp>
         <p:nvSpPr>
@@ -28259,6 +29979,10 @@
             <a:prstDash val="solid"/>
           </a:ln>
         </p:spPr>
+        <p:txBody>
+          <a:bodyPr/>
+          <a:p/>
+        </p:txBody>
       </p:sp>
       <p:pic>
         <p:nvPicPr>
@@ -28603,6 +30327,10 @@
             <a:prstDash val="solid"/>
           </a:ln>
         </p:spPr>
+        <p:txBody>
+          <a:bodyPr/>
+          <a:p/>
+        </p:txBody>
       </p:sp>
       <p:sp>
         <p:nvSpPr>
@@ -28642,7 +30370,7 @@
                 <a:ea typeface="Inter" pitchFamily="34" charset="-122"/>
                 <a:cs typeface="Inter" pitchFamily="34" charset="-120"/>
               </a:rPr>
-              <a:t>© 2026 Julian Krauß  ·  JK-CD-DE-2026-003  ·  Bernd-Blindow-Schulen Ravensburg</a:t>
+              <a:t>© 2026 Julian Krauß  ·  JK AXIS | GOLD MASTER  ·  Bernd-Blindow-Schulen Ravensburg</a:t>
             </a:r>
             <a:endParaRPr lang="en-US" sz="760" dirty="0"/>
           </a:p>
@@ -28720,6 +30448,10 @@
             <a:prstDash val="solid"/>
           </a:ln>
         </p:spPr>
+        <p:txBody>
+          <a:bodyPr/>
+          <a:p/>
+        </p:txBody>
       </p:sp>
       <p:sp>
         <p:nvSpPr>
@@ -28793,6 +30525,10 @@
             <a:prstDash val="solid"/>
           </a:ln>
         </p:spPr>
+        <p:txBody>
+          <a:bodyPr/>
+          <a:p/>
+        </p:txBody>
       </p:sp>
       <p:sp>
         <p:nvSpPr>
@@ -28866,6 +30602,10 @@
             <a:prstDash val="solid"/>
           </a:ln>
         </p:spPr>
+        <p:txBody>
+          <a:bodyPr/>
+          <a:p/>
+        </p:txBody>
       </p:sp>
       <p:sp>
         <p:nvSpPr>
@@ -28939,6 +30679,10 @@
             <a:prstDash val="solid"/>
           </a:ln>
         </p:spPr>
+        <p:txBody>
+          <a:bodyPr/>
+          <a:p/>
+        </p:txBody>
       </p:sp>
       <p:sp>
         <p:nvSpPr>
@@ -29012,6 +30756,10 @@
             <a:prstDash val="solid"/>
           </a:ln>
         </p:spPr>
+        <p:txBody>
+          <a:bodyPr/>
+          <a:p/>
+        </p:txBody>
       </p:sp>
       <p:sp>
         <p:nvSpPr>
@@ -29083,6 +30831,10 @@
             <a:prstDash val="solid"/>
           </a:ln>
         </p:spPr>
+        <p:txBody>
+          <a:bodyPr/>
+          <a:p/>
+        </p:txBody>
       </p:sp>
       <p:sp>
         <p:nvSpPr>
@@ -29360,6 +31112,10 @@
             <a:prstDash val="solid"/>
           </a:ln>
         </p:spPr>
+        <p:txBody>
+          <a:bodyPr/>
+          <a:p/>
+        </p:txBody>
       </p:sp>
       <p:sp>
         <p:nvSpPr>
@@ -29389,6 +31145,10 @@
             <a:prstDash val="solid"/>
           </a:ln>
         </p:spPr>
+        <p:txBody>
+          <a:bodyPr/>
+          <a:p/>
+        </p:txBody>
       </p:sp>
       <p:sp>
         <p:nvSpPr>
@@ -29416,6 +31176,10 @@
             <a:prstDash val="solid"/>
           </a:ln>
         </p:spPr>
+        <p:txBody>
+          <a:bodyPr/>
+          <a:p/>
+        </p:txBody>
       </p:sp>
       <p:sp>
         <p:nvSpPr>
@@ -29443,6 +31207,10 @@
             <a:prstDash val="solid"/>
           </a:ln>
         </p:spPr>
+        <p:txBody>
+          <a:bodyPr/>
+          <a:p/>
+        </p:txBody>
       </p:sp>
       <p:sp>
         <p:nvSpPr>
@@ -29470,6 +31238,10 @@
             <a:prstDash val="solid"/>
           </a:ln>
         </p:spPr>
+        <p:txBody>
+          <a:bodyPr/>
+          <a:p/>
+        </p:txBody>
       </p:sp>
       <p:sp>
         <p:nvSpPr>
@@ -29714,6 +31486,10 @@
             <a:prstDash val="solid"/>
           </a:ln>
         </p:spPr>
+        <p:txBody>
+          <a:bodyPr/>
+          <a:p/>
+        </p:txBody>
       </p:sp>
       <p:sp>
         <p:nvSpPr>
@@ -29741,6 +31517,10 @@
             <a:prstDash val="solid"/>
           </a:ln>
         </p:spPr>
+        <p:txBody>
+          <a:bodyPr/>
+          <a:p/>
+        </p:txBody>
       </p:sp>
       <p:sp>
         <p:nvSpPr>
@@ -29768,6 +31548,10 @@
             <a:prstDash val="solid"/>
           </a:ln>
         </p:spPr>
+        <p:txBody>
+          <a:bodyPr/>
+          <a:p/>
+        </p:txBody>
       </p:sp>
       <p:pic>
         <p:nvPicPr>
@@ -30112,6 +31896,10 @@
             <a:prstDash val="solid"/>
           </a:ln>
         </p:spPr>
+        <p:txBody>
+          <a:bodyPr/>
+          <a:p/>
+        </p:txBody>
       </p:sp>
       <p:sp>
         <p:nvSpPr>
@@ -30151,7 +31939,7 @@
                 <a:ea typeface="Inter" pitchFamily="34" charset="-122"/>
                 <a:cs typeface="Inter" pitchFamily="34" charset="-120"/>
               </a:rPr>
-              <a:t>© 2026 Julian Krauß  ·  JK-CD-DE-2026-003  ·  Bernd-Blindow-Schulen Ravensburg</a:t>
+              <a:t>© 2026 Julian Krauß  ·  JK AXIS | GOLD MASTER  ·  Bernd-Blindow-Schulen Ravensburg</a:t>
             </a:r>
             <a:endParaRPr lang="en-US" sz="760" dirty="0"/>
           </a:p>
@@ -30229,6 +32017,10 @@
             <a:prstDash val="solid"/>
           </a:ln>
         </p:spPr>
+        <p:txBody>
+          <a:bodyPr/>
+          <a:p/>
+        </p:txBody>
       </p:sp>
       <p:sp>
         <p:nvSpPr>
@@ -30302,6 +32094,10 @@
             <a:prstDash val="solid"/>
           </a:ln>
         </p:spPr>
+        <p:txBody>
+          <a:bodyPr/>
+          <a:p/>
+        </p:txBody>
       </p:sp>
       <p:sp>
         <p:nvSpPr>
@@ -30375,6 +32171,10 @@
             <a:prstDash val="solid"/>
           </a:ln>
         </p:spPr>
+        <p:txBody>
+          <a:bodyPr/>
+          <a:p/>
+        </p:txBody>
       </p:sp>
       <p:sp>
         <p:nvSpPr>
@@ -30448,6 +32248,10 @@
             <a:prstDash val="solid"/>
           </a:ln>
         </p:spPr>
+        <p:txBody>
+          <a:bodyPr/>
+          <a:p/>
+        </p:txBody>
       </p:sp>
       <p:sp>
         <p:nvSpPr>
@@ -30521,6 +32325,10 @@
             <a:prstDash val="solid"/>
           </a:ln>
         </p:spPr>
+        <p:txBody>
+          <a:bodyPr/>
+          <a:p/>
+        </p:txBody>
       </p:sp>
       <p:sp>
         <p:nvSpPr>
@@ -30594,6 +32402,10 @@
             <a:prstDash val="solid"/>
           </a:ln>
         </p:spPr>
+        <p:txBody>
+          <a:bodyPr/>
+          <a:p/>
+        </p:txBody>
       </p:sp>
       <p:sp>
         <p:nvSpPr>
@@ -30619,6 +32431,10 @@
             <a:prstDash val="solid"/>
           </a:ln>
         </p:spPr>
+        <p:txBody>
+          <a:bodyPr/>
+          <a:p/>
+        </p:txBody>
       </p:sp>
       <p:sp>
         <p:nvSpPr>
@@ -30644,6 +32460,10 @@
             <a:prstDash val="solid"/>
           </a:ln>
         </p:spPr>
+        <p:txBody>
+          <a:bodyPr/>
+          <a:p/>
+        </p:txBody>
       </p:sp>
       <p:sp>
         <p:nvSpPr>
@@ -30669,6 +32489,10 @@
             <a:prstDash val="solid"/>
           </a:ln>
         </p:spPr>
+        <p:txBody>
+          <a:bodyPr/>
+          <a:p/>
+        </p:txBody>
       </p:sp>
       <p:sp>
         <p:nvSpPr>
@@ -30694,6 +32518,10 @@
             <a:prstDash val="solid"/>
           </a:ln>
         </p:spPr>
+        <p:txBody>
+          <a:bodyPr/>
+          <a:p/>
+        </p:txBody>
       </p:sp>
       <p:sp>
         <p:nvSpPr>
@@ -30719,6 +32547,10 @@
             <a:prstDash val="solid"/>
           </a:ln>
         </p:spPr>
+        <p:txBody>
+          <a:bodyPr/>
+          <a:p/>
+        </p:txBody>
       </p:sp>
       <p:sp>
         <p:nvSpPr>
@@ -30744,6 +32576,10 @@
             <a:prstDash val="solid"/>
           </a:ln>
         </p:spPr>
+        <p:txBody>
+          <a:bodyPr/>
+          <a:p/>
+        </p:txBody>
       </p:sp>
       <p:sp>
         <p:nvSpPr>
@@ -30769,6 +32605,10 @@
             <a:prstDash val="solid"/>
           </a:ln>
         </p:spPr>
+        <p:txBody>
+          <a:bodyPr/>
+          <a:p/>
+        </p:txBody>
       </p:sp>
       <p:sp>
         <p:nvSpPr>
@@ -30794,6 +32634,10 @@
             <a:prstDash val="solid"/>
           </a:ln>
         </p:spPr>
+        <p:txBody>
+          <a:bodyPr/>
+          <a:p/>
+        </p:txBody>
       </p:sp>
       <p:sp>
         <p:nvSpPr>
@@ -30819,6 +32663,10 @@
             <a:prstDash val="solid"/>
           </a:ln>
         </p:spPr>
+        <p:txBody>
+          <a:bodyPr/>
+          <a:p/>
+        </p:txBody>
       </p:sp>
       <p:sp>
         <p:nvSpPr>
@@ -30844,6 +32692,10 @@
             <a:prstDash val="solid"/>
           </a:ln>
         </p:spPr>
+        <p:txBody>
+          <a:bodyPr/>
+          <a:p/>
+        </p:txBody>
       </p:sp>
       <p:sp>
         <p:nvSpPr>
@@ -30869,6 +32721,10 @@
             <a:prstDash val="solid"/>
           </a:ln>
         </p:spPr>
+        <p:txBody>
+          <a:bodyPr/>
+          <a:p/>
+        </p:txBody>
       </p:sp>
       <p:sp>
         <p:nvSpPr>
@@ -30894,6 +32750,10 @@
             <a:prstDash val="solid"/>
           </a:ln>
         </p:spPr>
+        <p:txBody>
+          <a:bodyPr/>
+          <a:p/>
+        </p:txBody>
       </p:sp>
       <p:sp>
         <p:nvSpPr>
@@ -30919,6 +32779,10 @@
             <a:prstDash val="solid"/>
           </a:ln>
         </p:spPr>
+        <p:txBody>
+          <a:bodyPr/>
+          <a:p/>
+        </p:txBody>
       </p:sp>
       <p:sp>
         <p:nvSpPr>
@@ -30944,6 +32808,10 @@
             <a:prstDash val="solid"/>
           </a:ln>
         </p:spPr>
+        <p:txBody>
+          <a:bodyPr/>
+          <a:p/>
+        </p:txBody>
       </p:sp>
       <p:sp>
         <p:nvSpPr>
@@ -30969,6 +32837,10 @@
             <a:prstDash val="solid"/>
           </a:ln>
         </p:spPr>
+        <p:txBody>
+          <a:bodyPr/>
+          <a:p/>
+        </p:txBody>
       </p:sp>
       <p:sp>
         <p:nvSpPr>
@@ -30994,6 +32866,10 @@
             <a:prstDash val="solid"/>
           </a:ln>
         </p:spPr>
+        <p:txBody>
+          <a:bodyPr/>
+          <a:p/>
+        </p:txBody>
       </p:sp>
       <p:sp>
         <p:nvSpPr>
@@ -31019,6 +32895,10 @@
             <a:prstDash val="solid"/>
           </a:ln>
         </p:spPr>
+        <p:txBody>
+          <a:bodyPr/>
+          <a:p/>
+        </p:txBody>
       </p:sp>
       <p:sp>
         <p:nvSpPr>
@@ -31044,6 +32924,10 @@
             <a:prstDash val="solid"/>
           </a:ln>
         </p:spPr>
+        <p:txBody>
+          <a:bodyPr/>
+          <a:p/>
+        </p:txBody>
       </p:sp>
       <p:sp>
         <p:nvSpPr>
@@ -31069,6 +32953,10 @@
             <a:prstDash val="solid"/>
           </a:ln>
         </p:spPr>
+        <p:txBody>
+          <a:bodyPr/>
+          <a:p/>
+        </p:txBody>
       </p:sp>
       <p:sp>
         <p:nvSpPr>
@@ -31094,6 +32982,10 @@
             <a:prstDash val="solid"/>
           </a:ln>
         </p:spPr>
+        <p:txBody>
+          <a:bodyPr/>
+          <a:p/>
+        </p:txBody>
       </p:sp>
       <p:sp>
         <p:nvSpPr>
@@ -31119,6 +33011,10 @@
             <a:prstDash val="solid"/>
           </a:ln>
         </p:spPr>
+        <p:txBody>
+          <a:bodyPr/>
+          <a:p/>
+        </p:txBody>
       </p:sp>
       <p:sp>
         <p:nvSpPr>
@@ -31144,6 +33040,10 @@
             <a:prstDash val="solid"/>
           </a:ln>
         </p:spPr>
+        <p:txBody>
+          <a:bodyPr/>
+          <a:p/>
+        </p:txBody>
       </p:sp>
       <p:sp>
         <p:nvSpPr>
@@ -31169,6 +33069,10 @@
             <a:prstDash val="solid"/>
           </a:ln>
         </p:spPr>
+        <p:txBody>
+          <a:bodyPr/>
+          <a:p/>
+        </p:txBody>
       </p:sp>
       <p:sp>
         <p:nvSpPr>
@@ -31194,6 +33098,10 @@
             <a:prstDash val="solid"/>
           </a:ln>
         </p:spPr>
+        <p:txBody>
+          <a:bodyPr/>
+          <a:p/>
+        </p:txBody>
       </p:sp>
       <p:sp>
         <p:nvSpPr>
@@ -31219,6 +33127,10 @@
             <a:prstDash val="solid"/>
           </a:ln>
         </p:spPr>
+        <p:txBody>
+          <a:bodyPr/>
+          <a:p/>
+        </p:txBody>
       </p:sp>
       <p:sp>
         <p:nvSpPr>
@@ -31244,6 +33156,10 @@
             <a:prstDash val="solid"/>
           </a:ln>
         </p:spPr>
+        <p:txBody>
+          <a:bodyPr/>
+          <a:p/>
+        </p:txBody>
       </p:sp>
       <p:sp>
         <p:nvSpPr>
@@ -31269,6 +33185,10 @@
             <a:prstDash val="solid"/>
           </a:ln>
         </p:spPr>
+        <p:txBody>
+          <a:bodyPr/>
+          <a:p/>
+        </p:txBody>
       </p:sp>
       <p:sp>
         <p:nvSpPr>
@@ -31294,6 +33214,10 @@
             <a:prstDash val="solid"/>
           </a:ln>
         </p:spPr>
+        <p:txBody>
+          <a:bodyPr/>
+          <a:p/>
+        </p:txBody>
       </p:sp>
       <p:sp>
         <p:nvSpPr>
@@ -31319,6 +33243,10 @@
             <a:prstDash val="solid"/>
           </a:ln>
         </p:spPr>
+        <p:txBody>
+          <a:bodyPr/>
+          <a:p/>
+        </p:txBody>
       </p:sp>
       <p:sp>
         <p:nvSpPr>
@@ -31344,6 +33272,10 @@
             <a:prstDash val="solid"/>
           </a:ln>
         </p:spPr>
+        <p:txBody>
+          <a:bodyPr/>
+          <a:p/>
+        </p:txBody>
       </p:sp>
       <p:sp>
         <p:nvSpPr>
@@ -31369,6 +33301,10 @@
             <a:prstDash val="solid"/>
           </a:ln>
         </p:spPr>
+        <p:txBody>
+          <a:bodyPr/>
+          <a:p/>
+        </p:txBody>
       </p:sp>
       <p:sp>
         <p:nvSpPr>
@@ -31394,6 +33330,10 @@
             <a:prstDash val="solid"/>
           </a:ln>
         </p:spPr>
+        <p:txBody>
+          <a:bodyPr/>
+          <a:p/>
+        </p:txBody>
       </p:sp>
       <p:sp>
         <p:nvSpPr>
@@ -31419,6 +33359,10 @@
             <a:prstDash val="solid"/>
           </a:ln>
         </p:spPr>
+        <p:txBody>
+          <a:bodyPr/>
+          <a:p/>
+        </p:txBody>
       </p:sp>
       <p:sp>
         <p:nvSpPr>
@@ -31444,6 +33388,10 @@
             <a:prstDash val="solid"/>
           </a:ln>
         </p:spPr>
+        <p:txBody>
+          <a:bodyPr/>
+          <a:p/>
+        </p:txBody>
       </p:sp>
       <p:sp>
         <p:nvSpPr>
@@ -31469,6 +33417,10 @@
             <a:prstDash val="solid"/>
           </a:ln>
         </p:spPr>
+        <p:txBody>
+          <a:bodyPr/>
+          <a:p/>
+        </p:txBody>
       </p:sp>
       <p:sp>
         <p:nvSpPr>
@@ -31494,6 +33446,10 @@
             <a:prstDash val="solid"/>
           </a:ln>
         </p:spPr>
+        <p:txBody>
+          <a:bodyPr/>
+          <a:p/>
+        </p:txBody>
       </p:sp>
       <p:sp>
         <p:nvSpPr>
@@ -31519,6 +33475,10 @@
             <a:prstDash val="solid"/>
           </a:ln>
         </p:spPr>
+        <p:txBody>
+          <a:bodyPr/>
+          <a:p/>
+        </p:txBody>
       </p:sp>
       <p:sp>
         <p:nvSpPr>
@@ -31544,6 +33504,10 @@
             <a:prstDash val="solid"/>
           </a:ln>
         </p:spPr>
+        <p:txBody>
+          <a:bodyPr/>
+          <a:p/>
+        </p:txBody>
       </p:sp>
       <p:sp>
         <p:nvSpPr>
@@ -31569,6 +33533,10 @@
             <a:prstDash val="solid"/>
           </a:ln>
         </p:spPr>
+        <p:txBody>
+          <a:bodyPr/>
+          <a:p/>
+        </p:txBody>
       </p:sp>
       <p:sp>
         <p:nvSpPr>
@@ -31594,6 +33562,10 @@
             <a:prstDash val="solid"/>
           </a:ln>
         </p:spPr>
+        <p:txBody>
+          <a:bodyPr/>
+          <a:p/>
+        </p:txBody>
       </p:sp>
       <p:sp>
         <p:nvSpPr>
@@ -31619,6 +33591,10 @@
             <a:prstDash val="solid"/>
           </a:ln>
         </p:spPr>
+        <p:txBody>
+          <a:bodyPr/>
+          <a:p/>
+        </p:txBody>
       </p:sp>
       <p:sp>
         <p:nvSpPr>
@@ -31644,6 +33620,10 @@
             <a:prstDash val="solid"/>
           </a:ln>
         </p:spPr>
+        <p:txBody>
+          <a:bodyPr/>
+          <a:p/>
+        </p:txBody>
       </p:sp>
       <p:sp>
         <p:nvSpPr>
@@ -31715,6 +33695,10 @@
             <a:prstDash val="solid"/>
           </a:ln>
         </p:spPr>
+        <p:txBody>
+          <a:bodyPr/>
+          <a:p/>
+        </p:txBody>
       </p:sp>
       <p:sp>
         <p:nvSpPr>
@@ -31788,6 +33772,10 @@
             <a:prstDash val="solid"/>
           </a:ln>
         </p:spPr>
+        <p:txBody>
+          <a:bodyPr/>
+          <a:p/>
+        </p:txBody>
       </p:sp>
       <p:sp>
         <p:nvSpPr>
@@ -31817,6 +33805,10 @@
             <a:prstDash val="solid"/>
           </a:ln>
         </p:spPr>
+        <p:txBody>
+          <a:bodyPr/>
+          <a:p/>
+        </p:txBody>
       </p:sp>
       <p:sp>
         <p:nvSpPr>
@@ -31844,6 +33836,10 @@
             <a:prstDash val="solid"/>
           </a:ln>
         </p:spPr>
+        <p:txBody>
+          <a:bodyPr/>
+          <a:p/>
+        </p:txBody>
       </p:sp>
       <p:sp>
         <p:nvSpPr>
@@ -31871,6 +33867,10 @@
             <a:prstDash val="solid"/>
           </a:ln>
         </p:spPr>
+        <p:txBody>
+          <a:bodyPr/>
+          <a:p/>
+        </p:txBody>
       </p:sp>
       <p:sp>
         <p:nvSpPr>
@@ -31898,6 +33898,10 @@
             <a:prstDash val="solid"/>
           </a:ln>
         </p:spPr>
+        <p:txBody>
+          <a:bodyPr/>
+          <a:p/>
+        </p:txBody>
       </p:sp>
       <p:sp>
         <p:nvSpPr>
@@ -32098,6 +34102,10 @@
             <a:prstDash val="solid"/>
           </a:ln>
         </p:spPr>
+        <p:txBody>
+          <a:bodyPr/>
+          <a:p/>
+        </p:txBody>
       </p:sp>
       <p:sp>
         <p:nvSpPr>
@@ -32125,6 +34133,10 @@
             <a:prstDash val="solid"/>
           </a:ln>
         </p:spPr>
+        <p:txBody>
+          <a:bodyPr/>
+          <a:p/>
+        </p:txBody>
       </p:sp>
       <p:sp>
         <p:nvSpPr>
@@ -32152,6 +34164,10 @@
             <a:prstDash val="solid"/>
           </a:ln>
         </p:spPr>
+        <p:txBody>
+          <a:bodyPr/>
+          <a:p/>
+        </p:txBody>
       </p:sp>
       <p:pic>
         <p:nvPicPr>
@@ -32496,6 +34512,10 @@
             <a:prstDash val="solid"/>
           </a:ln>
         </p:spPr>
+        <p:txBody>
+          <a:bodyPr/>
+          <a:p/>
+        </p:txBody>
       </p:sp>
       <p:sp>
         <p:nvSpPr>
@@ -32535,7 +34555,7 @@
                 <a:ea typeface="Inter" pitchFamily="34" charset="-122"/>
                 <a:cs typeface="Inter" pitchFamily="34" charset="-120"/>
               </a:rPr>
-              <a:t>© 2026 Julian Krauß  ·  JK-CD-DE-2026-003  ·  Bernd-Blindow-Schulen Ravensburg</a:t>
+              <a:t>© 2026 Julian Krauß  ·  JK AXIS | GOLD MASTER  ·  Bernd-Blindow-Schulen Ravensburg</a:t>
             </a:r>
             <a:endParaRPr lang="en-US" sz="760" dirty="0"/>
           </a:p>
@@ -32613,6 +34633,10 @@
             <a:prstDash val="solid"/>
           </a:ln>
         </p:spPr>
+        <p:txBody>
+          <a:bodyPr/>
+          <a:p/>
+        </p:txBody>
       </p:sp>
       <p:sp>
         <p:nvSpPr>
@@ -32686,6 +34710,10 @@
             <a:prstDash val="solid"/>
           </a:ln>
         </p:spPr>
+        <p:txBody>
+          <a:bodyPr/>
+          <a:p/>
+        </p:txBody>
       </p:sp>
       <p:sp>
         <p:nvSpPr>
@@ -32759,6 +34787,10 @@
             <a:prstDash val="solid"/>
           </a:ln>
         </p:spPr>
+        <p:txBody>
+          <a:bodyPr/>
+          <a:p/>
+        </p:txBody>
       </p:sp>
       <p:sp>
         <p:nvSpPr>
@@ -32832,6 +34864,10 @@
             <a:prstDash val="solid"/>
           </a:ln>
         </p:spPr>
+        <p:txBody>
+          <a:bodyPr/>
+          <a:p/>
+        </p:txBody>
       </p:sp>
       <p:sp>
         <p:nvSpPr>
@@ -32905,6 +34941,10 @@
             <a:prstDash val="solid"/>
           </a:ln>
         </p:spPr>
+        <p:txBody>
+          <a:bodyPr/>
+          <a:p/>
+        </p:txBody>
       </p:sp>
       <p:sp>
         <p:nvSpPr>
@@ -32976,6 +35016,10 @@
             <a:prstDash val="solid"/>
           </a:ln>
         </p:spPr>
+        <p:txBody>
+          <a:bodyPr/>
+          <a:p/>
+        </p:txBody>
       </p:sp>
       <p:sp>
         <p:nvSpPr>
@@ -33235,6 +35279,10 @@
             <a:prstDash val="solid"/>
           </a:ln>
         </p:spPr>
+        <p:txBody>
+          <a:bodyPr/>
+          <a:p/>
+        </p:txBody>
       </p:sp>
       <p:sp>
         <p:nvSpPr>
@@ -33262,6 +35310,10 @@
             <a:prstDash val="solid"/>
           </a:ln>
         </p:spPr>
+        <p:txBody>
+          <a:bodyPr/>
+          <a:p/>
+        </p:txBody>
       </p:sp>
       <p:sp>
         <p:nvSpPr>
@@ -33465,6 +35517,10 @@
             <a:prstDash val="solid"/>
           </a:ln>
         </p:spPr>
+        <p:txBody>
+          <a:bodyPr/>
+          <a:p/>
+        </p:txBody>
       </p:sp>
       <p:sp>
         <p:nvSpPr>
@@ -33492,6 +35548,10 @@
             <a:prstDash val="solid"/>
           </a:ln>
         </p:spPr>
+        <p:txBody>
+          <a:bodyPr/>
+          <a:p/>
+        </p:txBody>
       </p:sp>
       <p:sp>
         <p:nvSpPr>
@@ -33695,6 +35755,10 @@
             <a:prstDash val="solid"/>
           </a:ln>
         </p:spPr>
+        <p:txBody>
+          <a:bodyPr/>
+          <a:p/>
+        </p:txBody>
       </p:sp>
       <p:sp>
         <p:nvSpPr>
@@ -33722,6 +35786,10 @@
             <a:prstDash val="solid"/>
           </a:ln>
         </p:spPr>
+        <p:txBody>
+          <a:bodyPr/>
+          <a:p/>
+        </p:txBody>
       </p:sp>
       <p:sp>
         <p:nvSpPr>
